--- a/data/outputs/v2/Chemistry/SS3.1_Acids_and_Bases/quiz/Chemistry_G10_SS3.1_Acids_and_Bases_L4_QuickCheck.pptx
+++ b/data/outputs/v2/Chemistry/SS3.1_Acids_and_Bases/quiz/Chemistry_G10_SS3.1_Acids_and_Bases_L4_QuickCheck.pptx
@@ -14,12 +14,9 @@
     <p:sldId id="262" r:id="rId8"/>
     <p:sldId id="263" r:id="rId9"/>
     <p:sldId id="264" r:id="rId10"/>
-    <p:sldId id="265" r:id="rId11"/>
-    <p:sldId id="266" r:id="rId12"/>
-    <p:sldId id="267" r:id="rId13"/>
   </p:sldIdLst>
   <p:notesMasterIdLst>
-    <p:notesMasterId r:id="rId14"/>
+    <p:notesMasterId r:id="rId11"/>
   </p:notesMasterIdLst>
   <p:sldSz cx="12192000" cy="6858000"/>
   <p:notesSz cx="6858000" cy="12192000"/>
@@ -537,270 +534,6 @@
             <a:fld id="{F7021451-1387-4CA6-816F-3879F97B5CBC}" type="slidenum">
               <a:rPr lang="en-US"/>
               <a:t>1</a:t>
-            </a:fld>
-            <a:endParaRPr lang="en-US"/>
-          </a:p>
-        </p:txBody>
-      </p:sp>
-    </p:spTree>
-    <p:extLst>
-      <p:ext uri="{BB962C8B-B14F-4D97-AF65-F5344CB8AC3E}">
-        <p14:creationId xmlns:p14="http://schemas.microsoft.com/office/powerpoint/2010/main" val="1024086991"/>
-      </p:ext>
-    </p:extLst>
-  </p:cSld>
-  <p:clrMapOvr>
-    <a:masterClrMapping/>
-  </p:clrMapOvr>
-</p:notes>
-</file>
-
-<file path=ppt/notesSlides/notesSlide10.xml><?xml version="1.0" encoding="utf-8"?>
-<p:notes xmlns:a="http://schemas.openxmlformats.org/drawingml/2006/main" xmlns:r="http://schemas.openxmlformats.org/officeDocument/2006/relationships" xmlns:p="http://schemas.openxmlformats.org/presentationml/2006/main">
-  <p:cSld>
-    <p:spTree>
-      <p:nvGrpSpPr>
-        <p:cNvPr id="1" name=""/>
-        <p:cNvGrpSpPr/>
-        <p:nvPr/>
-      </p:nvGrpSpPr>
-      <p:grpSpPr>
-        <a:xfrm>
-          <a:off x="0" y="0"/>
-          <a:ext cx="0" cy="0"/>
-          <a:chOff x="0" y="0"/>
-          <a:chExt cx="0" cy="0"/>
-        </a:xfrm>
-      </p:grpSpPr>
-      <p:sp>
-        <p:nvSpPr>
-          <p:cNvPr id="2" name="Slide Image Placeholder 1"/>
-          <p:cNvSpPr>
-            <a:spLocks noGrp="1" noRot="1" noChangeAspect="1"/>
-          </p:cNvSpPr>
-          <p:nvPr>
-            <p:ph type="sldImg"/>
-          </p:nvPr>
-        </p:nvSpPr>
-        <p:spPr/>
-      </p:sp>
-      <p:sp>
-        <p:nvSpPr>
-          <p:cNvPr id="3" name="Notes Placeholder 2"/>
-          <p:cNvSpPr>
-            <a:spLocks noGrp="1"/>
-          </p:cNvSpPr>
-          <p:nvPr>
-            <p:ph type="body" idx="1"/>
-          </p:nvPr>
-        </p:nvSpPr>
-        <p:spPr/>
-        <p:txBody>
-          <a:bodyPr/>
-          <a:lstStyle/>
-          <a:p>
-            <a:r>
-              <a:rPr lang="en-US" dirty="0"/>
-              <a:t/>
-            </a:r>
-            <a:endParaRPr lang="en-US" dirty="0"/>
-          </a:p>
-        </p:txBody>
-      </p:sp>
-      <p:sp>
-        <p:nvSpPr>
-          <p:cNvPr id="4" name="Slide Number Placeholder 3"/>
-          <p:cNvSpPr>
-            <a:spLocks noGrp="1"/>
-          </p:cNvSpPr>
-          <p:nvPr>
-            <p:ph type="sldNum" sz="quarter" idx="10"/>
-          </p:nvPr>
-        </p:nvSpPr>
-        <p:spPr/>
-        <p:txBody>
-          <a:bodyPr/>
-          <a:lstStyle/>
-          <a:p>
-            <a:fld id="{F7021451-1387-4CA6-816F-3879F97B5CBC}" type="slidenum">
-              <a:rPr lang="en-US"/>
-              <a:t>10</a:t>
-            </a:fld>
-            <a:endParaRPr lang="en-US"/>
-          </a:p>
-        </p:txBody>
-      </p:sp>
-    </p:spTree>
-    <p:extLst>
-      <p:ext uri="{BB962C8B-B14F-4D97-AF65-F5344CB8AC3E}">
-        <p14:creationId xmlns:p14="http://schemas.microsoft.com/office/powerpoint/2010/main" val="1024086991"/>
-      </p:ext>
-    </p:extLst>
-  </p:cSld>
-  <p:clrMapOvr>
-    <a:masterClrMapping/>
-  </p:clrMapOvr>
-</p:notes>
-</file>
-
-<file path=ppt/notesSlides/notesSlide11.xml><?xml version="1.0" encoding="utf-8"?>
-<p:notes xmlns:a="http://schemas.openxmlformats.org/drawingml/2006/main" xmlns:r="http://schemas.openxmlformats.org/officeDocument/2006/relationships" xmlns:p="http://schemas.openxmlformats.org/presentationml/2006/main">
-  <p:cSld>
-    <p:spTree>
-      <p:nvGrpSpPr>
-        <p:cNvPr id="1" name=""/>
-        <p:cNvGrpSpPr/>
-        <p:nvPr/>
-      </p:nvGrpSpPr>
-      <p:grpSpPr>
-        <a:xfrm>
-          <a:off x="0" y="0"/>
-          <a:ext cx="0" cy="0"/>
-          <a:chOff x="0" y="0"/>
-          <a:chExt cx="0" cy="0"/>
-        </a:xfrm>
-      </p:grpSpPr>
-      <p:sp>
-        <p:nvSpPr>
-          <p:cNvPr id="2" name="Slide Image Placeholder 1"/>
-          <p:cNvSpPr>
-            <a:spLocks noGrp="1" noRot="1" noChangeAspect="1"/>
-          </p:cNvSpPr>
-          <p:nvPr>
-            <p:ph type="sldImg"/>
-          </p:nvPr>
-        </p:nvSpPr>
-        <p:spPr/>
-      </p:sp>
-      <p:sp>
-        <p:nvSpPr>
-          <p:cNvPr id="3" name="Notes Placeholder 2"/>
-          <p:cNvSpPr>
-            <a:spLocks noGrp="1"/>
-          </p:cNvSpPr>
-          <p:nvPr>
-            <p:ph type="body" idx="1"/>
-          </p:nvPr>
-        </p:nvSpPr>
-        <p:spPr/>
-        <p:txBody>
-          <a:bodyPr/>
-          <a:lstStyle/>
-          <a:p>
-            <a:r>
-              <a:rPr lang="en-US" dirty="0"/>
-              <a:t/>
-            </a:r>
-            <a:endParaRPr lang="en-US" dirty="0"/>
-          </a:p>
-        </p:txBody>
-      </p:sp>
-      <p:sp>
-        <p:nvSpPr>
-          <p:cNvPr id="4" name="Slide Number Placeholder 3"/>
-          <p:cNvSpPr>
-            <a:spLocks noGrp="1"/>
-          </p:cNvSpPr>
-          <p:nvPr>
-            <p:ph type="sldNum" sz="quarter" idx="10"/>
-          </p:nvPr>
-        </p:nvSpPr>
-        <p:spPr/>
-        <p:txBody>
-          <a:bodyPr/>
-          <a:lstStyle/>
-          <a:p>
-            <a:fld id="{F7021451-1387-4CA6-816F-3879F97B5CBC}" type="slidenum">
-              <a:rPr lang="en-US"/>
-              <a:t>11</a:t>
-            </a:fld>
-            <a:endParaRPr lang="en-US"/>
-          </a:p>
-        </p:txBody>
-      </p:sp>
-    </p:spTree>
-    <p:extLst>
-      <p:ext uri="{BB962C8B-B14F-4D97-AF65-F5344CB8AC3E}">
-        <p14:creationId xmlns:p14="http://schemas.microsoft.com/office/powerpoint/2010/main" val="1024086991"/>
-      </p:ext>
-    </p:extLst>
-  </p:cSld>
-  <p:clrMapOvr>
-    <a:masterClrMapping/>
-  </p:clrMapOvr>
-</p:notes>
-</file>
-
-<file path=ppt/notesSlides/notesSlide12.xml><?xml version="1.0" encoding="utf-8"?>
-<p:notes xmlns:a="http://schemas.openxmlformats.org/drawingml/2006/main" xmlns:r="http://schemas.openxmlformats.org/officeDocument/2006/relationships" xmlns:p="http://schemas.openxmlformats.org/presentationml/2006/main">
-  <p:cSld>
-    <p:spTree>
-      <p:nvGrpSpPr>
-        <p:cNvPr id="1" name=""/>
-        <p:cNvGrpSpPr/>
-        <p:nvPr/>
-      </p:nvGrpSpPr>
-      <p:grpSpPr>
-        <a:xfrm>
-          <a:off x="0" y="0"/>
-          <a:ext cx="0" cy="0"/>
-          <a:chOff x="0" y="0"/>
-          <a:chExt cx="0" cy="0"/>
-        </a:xfrm>
-      </p:grpSpPr>
-      <p:sp>
-        <p:nvSpPr>
-          <p:cNvPr id="2" name="Slide Image Placeholder 1"/>
-          <p:cNvSpPr>
-            <a:spLocks noGrp="1" noRot="1" noChangeAspect="1"/>
-          </p:cNvSpPr>
-          <p:nvPr>
-            <p:ph type="sldImg"/>
-          </p:nvPr>
-        </p:nvSpPr>
-        <p:spPr/>
-      </p:sp>
-      <p:sp>
-        <p:nvSpPr>
-          <p:cNvPr id="3" name="Notes Placeholder 2"/>
-          <p:cNvSpPr>
-            <a:spLocks noGrp="1"/>
-          </p:cNvSpPr>
-          <p:nvPr>
-            <p:ph type="body" idx="1"/>
-          </p:nvPr>
-        </p:nvSpPr>
-        <p:spPr/>
-        <p:txBody>
-          <a:bodyPr/>
-          <a:lstStyle/>
-          <a:p>
-            <a:r>
-              <a:rPr lang="en-US" dirty="0"/>
-              <a:t/>
-            </a:r>
-            <a:endParaRPr lang="en-US" dirty="0"/>
-          </a:p>
-        </p:txBody>
-      </p:sp>
-      <p:sp>
-        <p:nvSpPr>
-          <p:cNvPr id="4" name="Slide Number Placeholder 3"/>
-          <p:cNvSpPr>
-            <a:spLocks noGrp="1"/>
-          </p:cNvSpPr>
-          <p:nvPr>
-            <p:ph type="sldNum" sz="quarter" idx="10"/>
-          </p:nvPr>
-        </p:nvSpPr>
-        <p:spPr/>
-        <p:txBody>
-          <a:bodyPr/>
-          <a:lstStyle/>
-          <a:p>
-            <a:fld id="{F7021451-1387-4CA6-816F-3879F97B5CBC}" type="slidenum">
-              <a:rPr lang="en-US"/>
-              <a:t>12</a:t>
             </a:fld>
             <a:endParaRPr lang="en-US"/>
           </a:p>
@@ -2004,7 +1737,7 @@
                 <a:ea typeface="Arial" pitchFamily="34" charset="-122"/>
                 <a:cs typeface="Arial" pitchFamily="34" charset="-120"/>
               </a:rPr>
-              <a:t>10 multiple-choice questions  •  choose A, B, C or D</a:t>
+              <a:t>7 multiple-choice questions  •  choose A, B, C or D</a:t>
             </a:r>
             <a:endParaRPr lang="en-US" sz="1600" dirty="0"/>
           </a:p>
@@ -2120,1336 +1853,6 @@
               <a:t> (https://creativecommons.org/licenses/by-nc/4.0/).</a:t>
             </a:r>
             <a:endParaRPr lang="en-US" sz="900" dirty="0"/>
-          </a:p>
-        </p:txBody>
-      </p:sp>
-    </p:spTree>
-  </p:cSld>
-  <p:clrMapOvr>
-    <a:masterClrMapping/>
-  </p:clrMapOvr>
-</p:sld>
-</file>
-
-<file path=ppt/slides/slide10.xml><?xml version="1.0" encoding="utf-8"?>
-<p:sld xmlns:a="http://schemas.openxmlformats.org/drawingml/2006/main" xmlns:r="http://schemas.openxmlformats.org/officeDocument/2006/relationships" xmlns:p="http://schemas.openxmlformats.org/presentationml/2006/main">
-  <p:cSld name="Slide 10">
-    <p:bg>
-      <p:bgPr>
-        <a:solidFill>
-          <a:srgbClr val="6A4C93"/>
-        </a:solidFill>
-      </p:bgPr>
-    </p:bg>
-    <p:spTree>
-      <p:nvGrpSpPr>
-        <p:cNvPr id="1" name=""/>
-        <p:cNvGrpSpPr/>
-        <p:nvPr/>
-      </p:nvGrpSpPr>
-      <p:grpSpPr>
-        <a:xfrm>
-          <a:off x="0" y="0"/>
-          <a:ext cx="0" cy="0"/>
-          <a:chOff x="0" y="0"/>
-          <a:chExt cx="0" cy="0"/>
-        </a:xfrm>
-      </p:grpSpPr>
-      <p:sp>
-        <p:nvSpPr>
-          <p:cNvPr id="2" name="Text 0"/>
-          <p:cNvSpPr/>
-          <p:nvPr/>
-        </p:nvSpPr>
-        <p:spPr>
-          <a:xfrm>
-            <a:off x="548640" y="365760"/>
-            <a:ext cx="6400800" cy="365760"/>
-          </a:xfrm>
-          <a:prstGeom prst="rect">
-            <a:avLst/>
-          </a:prstGeom>
-          <a:noFill/>
-          <a:ln/>
-        </p:spPr>
-        <p:txBody>
-          <a:bodyPr wrap="square" lIns="0" tIns="0" rIns="0" bIns="0" rtlCol="0" anchor="ctr"/>
-          <a:lstStyle/>
-          <a:p>
-            <a:pPr indent="0" marL="0">
-              <a:buNone/>
-            </a:pPr>
-            <a:r>
-              <a:rPr lang="en-US" sz="1300" b="1" spc="200" kern="0" dirty="0">
-                <a:solidFill>
-                  <a:srgbClr val="E0D6F0"/>
-                </a:solidFill>
-                <a:latin typeface="Arial" pitchFamily="34" charset="0"/>
-                <a:ea typeface="Arial" pitchFamily="34" charset="-122"/>
-                <a:cs typeface="Arial" pitchFamily="34" charset="-120"/>
-              </a:rPr>
-              <a:t>QUESTION 9 OF 10</a:t>
-            </a:r>
-            <a:endParaRPr lang="en-US" sz="1300" dirty="0"/>
-          </a:p>
-        </p:txBody>
-      </p:sp>
-      <p:sp>
-        <p:nvSpPr>
-          <p:cNvPr id="3" name="Shape 1"/>
-          <p:cNvSpPr/>
-          <p:nvPr/>
-        </p:nvSpPr>
-        <p:spPr>
-          <a:xfrm>
-            <a:off x="8138160" y="320040"/>
-            <a:ext cx="3474720" cy="365760"/>
-          </a:xfrm>
-          <a:prstGeom prst="roundRect">
-            <a:avLst>
-              <a:gd name="adj" fmla="val 15000"/>
-            </a:avLst>
-          </a:prstGeom>
-          <a:solidFill>
-            <a:srgbClr val="5A3F80"/>
-          </a:solidFill>
-          <a:ln/>
-        </p:spPr>
-      </p:sp>
-      <p:sp>
-        <p:nvSpPr>
-          <p:cNvPr id="4" name="Text 2"/>
-          <p:cNvSpPr/>
-          <p:nvPr/>
-        </p:nvSpPr>
-        <p:spPr>
-          <a:xfrm>
-            <a:off x="8138160" y="320040"/>
-            <a:ext cx="3474720" cy="365760"/>
-          </a:xfrm>
-          <a:prstGeom prst="rect">
-            <a:avLst/>
-          </a:prstGeom>
-          <a:noFill/>
-          <a:ln/>
-        </p:spPr>
-        <p:txBody>
-          <a:bodyPr wrap="square" lIns="0" tIns="0" rIns="0" bIns="0" rtlCol="0" anchor="ctr"/>
-          <a:lstStyle/>
-          <a:p>
-            <a:pPr algn="ctr" indent="0" marL="0">
-              <a:buNone/>
-            </a:pPr>
-            <a:r>
-              <a:rPr lang="en-US" sz="1100" i="1" dirty="0">
-                <a:solidFill>
-                  <a:srgbClr val="E0D6F0"/>
-                </a:solidFill>
-                <a:latin typeface="Arial" pitchFamily="34" charset="0"/>
-                <a:ea typeface="Arial" pitchFamily="34" charset="-122"/>
-                <a:cs typeface="Arial" pitchFamily="34" charset="-120"/>
-              </a:rPr>
-              <a:t>Use after: DQB phase</a:t>
-            </a:r>
-            <a:endParaRPr lang="en-US" sz="1100" dirty="0"/>
-          </a:p>
-        </p:txBody>
-      </p:sp>
-      <p:sp>
-        <p:nvSpPr>
-          <p:cNvPr id="5" name="Text 3"/>
-          <p:cNvSpPr/>
-          <p:nvPr/>
-        </p:nvSpPr>
-        <p:spPr>
-          <a:xfrm>
-            <a:off x="548640" y="868680"/>
-            <a:ext cx="11064240" cy="1325880"/>
-          </a:xfrm>
-          <a:prstGeom prst="rect">
-            <a:avLst/>
-          </a:prstGeom>
-          <a:noFill/>
-          <a:ln/>
-        </p:spPr>
-        <p:txBody>
-          <a:bodyPr wrap="square" lIns="0" tIns="0" rIns="0" bIns="0" rtlCol="0" anchor="ctr"/>
-          <a:lstStyle/>
-          <a:p>
-            <a:pPr indent="0" marL="0">
-              <a:buNone/>
-            </a:pPr>
-            <a:r>
-              <a:rPr lang="en-US" sz="2000" b="1" dirty="0">
-                <a:solidFill>
-                  <a:srgbClr val="FFFFFF"/>
-                </a:solidFill>
-                <a:latin typeface="Arial" pitchFamily="34" charset="0"/>
-                <a:ea typeface="Arial" pitchFamily="34" charset="-122"/>
-                <a:cs typeface="Arial" pitchFamily="34" charset="-120"/>
-              </a:rPr>
-              <a:t>After today's experiment, which question from earlier lessons can the class move to the 'SOLVED' zone on the Driving Question Board?</a:t>
-            </a:r>
-            <a:endParaRPr lang="en-US" sz="2000" dirty="0"/>
-          </a:p>
-        </p:txBody>
-      </p:sp>
-      <p:sp>
-        <p:nvSpPr>
-          <p:cNvPr id="6" name="Shape 4"/>
-          <p:cNvSpPr/>
-          <p:nvPr/>
-        </p:nvSpPr>
-        <p:spPr>
-          <a:xfrm>
-            <a:off x="731520" y="2331720"/>
-            <a:ext cx="10698480" cy="777240"/>
-          </a:xfrm>
-          <a:prstGeom prst="roundRect">
-            <a:avLst>
-              <a:gd name="adj" fmla="val 9412"/>
-            </a:avLst>
-          </a:prstGeom>
-          <a:solidFill>
-            <a:srgbClr val="7C5CAA"/>
-          </a:solidFill>
-          <a:ln/>
-        </p:spPr>
-      </p:sp>
-      <p:sp>
-        <p:nvSpPr>
-          <p:cNvPr id="7" name="Text 5"/>
-          <p:cNvSpPr/>
-          <p:nvPr/>
-        </p:nvSpPr>
-        <p:spPr>
-          <a:xfrm>
-            <a:off x="914400" y="2331720"/>
-            <a:ext cx="548640" cy="777240"/>
-          </a:xfrm>
-          <a:prstGeom prst="rect">
-            <a:avLst/>
-          </a:prstGeom>
-          <a:noFill/>
-          <a:ln/>
-        </p:spPr>
-        <p:txBody>
-          <a:bodyPr wrap="square" lIns="0" tIns="0" rIns="0" bIns="0" rtlCol="0" anchor="ctr"/>
-          <a:lstStyle/>
-          <a:p>
-            <a:pPr indent="0" marL="0">
-              <a:buNone/>
-            </a:pPr>
-            <a:r>
-              <a:rPr lang="en-US" sz="1800" b="1" dirty="0">
-                <a:solidFill>
-                  <a:srgbClr val="FFFFFF"/>
-                </a:solidFill>
-                <a:latin typeface="Arial" pitchFamily="34" charset="0"/>
-                <a:ea typeface="Arial" pitchFamily="34" charset="-122"/>
-                <a:cs typeface="Arial" pitchFamily="34" charset="-120"/>
-              </a:rPr>
-              <a:t>A</a:t>
-            </a:r>
-            <a:endParaRPr lang="en-US" sz="1800" dirty="0"/>
-          </a:p>
-        </p:txBody>
-      </p:sp>
-      <p:sp>
-        <p:nvSpPr>
-          <p:cNvPr id="8" name="Text 6"/>
-          <p:cNvSpPr/>
-          <p:nvPr/>
-        </p:nvSpPr>
-        <p:spPr>
-          <a:xfrm>
-            <a:off x="1554480" y="2331720"/>
-            <a:ext cx="9692640" cy="777240"/>
-          </a:xfrm>
-          <a:prstGeom prst="rect">
-            <a:avLst/>
-          </a:prstGeom>
-          <a:noFill/>
-          <a:ln/>
-        </p:spPr>
-        <p:txBody>
-          <a:bodyPr wrap="square" lIns="0" tIns="0" rIns="0" bIns="0" rtlCol="0" anchor="ctr"/>
-          <a:lstStyle/>
-          <a:p>
-            <a:pPr indent="0" marL="0">
-              <a:buNone/>
-            </a:pPr>
-            <a:r>
-              <a:rPr lang="en-US" sz="1700" dirty="0">
-                <a:solidFill>
-                  <a:srgbClr val="FFFFFF"/>
-                </a:solidFill>
-                <a:latin typeface="Arial" pitchFamily="34" charset="0"/>
-                <a:ea typeface="Arial" pitchFamily="34" charset="-122"/>
-                <a:cs typeface="Arial" pitchFamily="34" charset="-120"/>
-              </a:rPr>
-              <a:t>Will an acid harm our stomach or corrode metal?</a:t>
-            </a:r>
-            <a:endParaRPr lang="en-US" sz="1700" dirty="0"/>
-          </a:p>
-        </p:txBody>
-      </p:sp>
-      <p:sp>
-        <p:nvSpPr>
-          <p:cNvPr id="9" name="Shape 7"/>
-          <p:cNvSpPr/>
-          <p:nvPr/>
-        </p:nvSpPr>
-        <p:spPr>
-          <a:xfrm>
-            <a:off x="731520" y="3246120"/>
-            <a:ext cx="10698480" cy="777240"/>
-          </a:xfrm>
-          <a:prstGeom prst="roundRect">
-            <a:avLst>
-              <a:gd name="adj" fmla="val 9412"/>
-            </a:avLst>
-          </a:prstGeom>
-          <a:solidFill>
-            <a:srgbClr val="7C5CAA"/>
-          </a:solidFill>
-          <a:ln/>
-        </p:spPr>
-      </p:sp>
-      <p:sp>
-        <p:nvSpPr>
-          <p:cNvPr id="10" name="Text 8"/>
-          <p:cNvSpPr/>
-          <p:nvPr/>
-        </p:nvSpPr>
-        <p:spPr>
-          <a:xfrm>
-            <a:off x="914400" y="3246120"/>
-            <a:ext cx="548640" cy="777240"/>
-          </a:xfrm>
-          <a:prstGeom prst="rect">
-            <a:avLst/>
-          </a:prstGeom>
-          <a:noFill/>
-          <a:ln/>
-        </p:spPr>
-        <p:txBody>
-          <a:bodyPr wrap="square" lIns="0" tIns="0" rIns="0" bIns="0" rtlCol="0" anchor="ctr"/>
-          <a:lstStyle/>
-          <a:p>
-            <a:pPr indent="0" marL="0">
-              <a:buNone/>
-            </a:pPr>
-            <a:r>
-              <a:rPr lang="en-US" sz="1800" b="1" dirty="0">
-                <a:solidFill>
-                  <a:srgbClr val="FFFFFF"/>
-                </a:solidFill>
-                <a:latin typeface="Arial" pitchFamily="34" charset="0"/>
-                <a:ea typeface="Arial" pitchFamily="34" charset="-122"/>
-                <a:cs typeface="Arial" pitchFamily="34" charset="-120"/>
-              </a:rPr>
-              <a:t>B</a:t>
-            </a:r>
-            <a:endParaRPr lang="en-US" sz="1800" dirty="0"/>
-          </a:p>
-        </p:txBody>
-      </p:sp>
-      <p:sp>
-        <p:nvSpPr>
-          <p:cNvPr id="11" name="Text 9"/>
-          <p:cNvSpPr/>
-          <p:nvPr/>
-        </p:nvSpPr>
-        <p:spPr>
-          <a:xfrm>
-            <a:off x="1554480" y="3246120"/>
-            <a:ext cx="9692640" cy="777240"/>
-          </a:xfrm>
-          <a:prstGeom prst="rect">
-            <a:avLst/>
-          </a:prstGeom>
-          <a:noFill/>
-          <a:ln/>
-        </p:spPr>
-        <p:txBody>
-          <a:bodyPr wrap="square" lIns="0" tIns="0" rIns="0" bIns="0" rtlCol="0" anchor="ctr"/>
-          <a:lstStyle/>
-          <a:p>
-            <a:pPr indent="0" marL="0">
-              <a:buNone/>
-            </a:pPr>
-            <a:r>
-              <a:rPr lang="en-US" sz="1700" dirty="0">
-                <a:solidFill>
-                  <a:srgbClr val="FFFFFF"/>
-                </a:solidFill>
-                <a:latin typeface="Arial" pitchFamily="34" charset="0"/>
-                <a:ea typeface="Arial" pitchFamily="34" charset="-122"/>
-                <a:cs typeface="Arial" pitchFamily="34" charset="-120"/>
-              </a:rPr>
-              <a:t>Which of these familiar liquids are acids and which are bases?</a:t>
-            </a:r>
-            <a:endParaRPr lang="en-US" sz="1700" dirty="0"/>
-          </a:p>
-        </p:txBody>
-      </p:sp>
-      <p:sp>
-        <p:nvSpPr>
-          <p:cNvPr id="12" name="Shape 10"/>
-          <p:cNvSpPr/>
-          <p:nvPr/>
-        </p:nvSpPr>
-        <p:spPr>
-          <a:xfrm>
-            <a:off x="731520" y="4160520"/>
-            <a:ext cx="10698480" cy="777240"/>
-          </a:xfrm>
-          <a:prstGeom prst="roundRect">
-            <a:avLst>
-              <a:gd name="adj" fmla="val 9412"/>
-            </a:avLst>
-          </a:prstGeom>
-          <a:solidFill>
-            <a:srgbClr val="7C5CAA"/>
-          </a:solidFill>
-          <a:ln/>
-        </p:spPr>
-      </p:sp>
-      <p:sp>
-        <p:nvSpPr>
-          <p:cNvPr id="13" name="Text 11"/>
-          <p:cNvSpPr/>
-          <p:nvPr/>
-        </p:nvSpPr>
-        <p:spPr>
-          <a:xfrm>
-            <a:off x="914400" y="4160520"/>
-            <a:ext cx="548640" cy="777240"/>
-          </a:xfrm>
-          <a:prstGeom prst="rect">
-            <a:avLst/>
-          </a:prstGeom>
-          <a:noFill/>
-          <a:ln/>
-        </p:spPr>
-        <p:txBody>
-          <a:bodyPr wrap="square" lIns="0" tIns="0" rIns="0" bIns="0" rtlCol="0" anchor="ctr"/>
-          <a:lstStyle/>
-          <a:p>
-            <a:pPr indent="0" marL="0">
-              <a:buNone/>
-            </a:pPr>
-            <a:r>
-              <a:rPr lang="en-US" sz="1800" b="1" dirty="0">
-                <a:solidFill>
-                  <a:srgbClr val="FFFFFF"/>
-                </a:solidFill>
-                <a:latin typeface="Arial" pitchFamily="34" charset="0"/>
-                <a:ea typeface="Arial" pitchFamily="34" charset="-122"/>
-                <a:cs typeface="Arial" pitchFamily="34" charset="-120"/>
-              </a:rPr>
-              <a:t>C</a:t>
-            </a:r>
-            <a:endParaRPr lang="en-US" sz="1800" dirty="0"/>
-          </a:p>
-        </p:txBody>
-      </p:sp>
-      <p:sp>
-        <p:nvSpPr>
-          <p:cNvPr id="14" name="Text 12"/>
-          <p:cNvSpPr/>
-          <p:nvPr/>
-        </p:nvSpPr>
-        <p:spPr>
-          <a:xfrm>
-            <a:off x="1554480" y="4160520"/>
-            <a:ext cx="9692640" cy="777240"/>
-          </a:xfrm>
-          <a:prstGeom prst="rect">
-            <a:avLst/>
-          </a:prstGeom>
-          <a:noFill/>
-          <a:ln/>
-        </p:spPr>
-        <p:txBody>
-          <a:bodyPr wrap="square" lIns="0" tIns="0" rIns="0" bIns="0" rtlCol="0" anchor="ctr"/>
-          <a:lstStyle/>
-          <a:p>
-            <a:pPr indent="0" marL="0">
-              <a:buNone/>
-            </a:pPr>
-            <a:r>
-              <a:rPr lang="en-US" sz="1700" dirty="0">
-                <a:solidFill>
-                  <a:srgbClr val="FFFFFF"/>
-                </a:solidFill>
-                <a:latin typeface="Arial" pitchFamily="34" charset="0"/>
-                <a:ea typeface="Arial" pitchFamily="34" charset="-122"/>
-                <a:cs typeface="Arial" pitchFamily="34" charset="-120"/>
-              </a:rPr>
-              <a:t>Why do acids make some substances fizz?</a:t>
-            </a:r>
-            <a:endParaRPr lang="en-US" sz="1700" dirty="0"/>
-          </a:p>
-        </p:txBody>
-      </p:sp>
-      <p:sp>
-        <p:nvSpPr>
-          <p:cNvPr id="15" name="Shape 13"/>
-          <p:cNvSpPr/>
-          <p:nvPr/>
-        </p:nvSpPr>
-        <p:spPr>
-          <a:xfrm>
-            <a:off x="731520" y="5074920"/>
-            <a:ext cx="10698480" cy="777240"/>
-          </a:xfrm>
-          <a:prstGeom prst="roundRect">
-            <a:avLst>
-              <a:gd name="adj" fmla="val 9412"/>
-            </a:avLst>
-          </a:prstGeom>
-          <a:solidFill>
-            <a:srgbClr val="7C5CAA"/>
-          </a:solidFill>
-          <a:ln/>
-        </p:spPr>
-      </p:sp>
-      <p:sp>
-        <p:nvSpPr>
-          <p:cNvPr id="16" name="Text 14"/>
-          <p:cNvSpPr/>
-          <p:nvPr/>
-        </p:nvSpPr>
-        <p:spPr>
-          <a:xfrm>
-            <a:off x="914400" y="5074920"/>
-            <a:ext cx="548640" cy="777240"/>
-          </a:xfrm>
-          <a:prstGeom prst="rect">
-            <a:avLst/>
-          </a:prstGeom>
-          <a:noFill/>
-          <a:ln/>
-        </p:spPr>
-        <p:txBody>
-          <a:bodyPr wrap="square" lIns="0" tIns="0" rIns="0" bIns="0" rtlCol="0" anchor="ctr"/>
-          <a:lstStyle/>
-          <a:p>
-            <a:pPr indent="0" marL="0">
-              <a:buNone/>
-            </a:pPr>
-            <a:r>
-              <a:rPr lang="en-US" sz="1800" b="1" dirty="0">
-                <a:solidFill>
-                  <a:srgbClr val="FFFFFF"/>
-                </a:solidFill>
-                <a:latin typeface="Arial" pitchFamily="34" charset="0"/>
-                <a:ea typeface="Arial" pitchFamily="34" charset="-122"/>
-                <a:cs typeface="Arial" pitchFamily="34" charset="-120"/>
-              </a:rPr>
-              <a:t>D</a:t>
-            </a:r>
-            <a:endParaRPr lang="en-US" sz="1800" dirty="0"/>
-          </a:p>
-        </p:txBody>
-      </p:sp>
-      <p:sp>
-        <p:nvSpPr>
-          <p:cNvPr id="17" name="Text 15"/>
-          <p:cNvSpPr/>
-          <p:nvPr/>
-        </p:nvSpPr>
-        <p:spPr>
-          <a:xfrm>
-            <a:off x="1554480" y="5074920"/>
-            <a:ext cx="9692640" cy="777240"/>
-          </a:xfrm>
-          <a:prstGeom prst="rect">
-            <a:avLst/>
-          </a:prstGeom>
-          <a:noFill/>
-          <a:ln/>
-        </p:spPr>
-        <p:txBody>
-          <a:bodyPr wrap="square" lIns="0" tIns="0" rIns="0" bIns="0" rtlCol="0" anchor="ctr"/>
-          <a:lstStyle/>
-          <a:p>
-            <a:pPr indent="0" marL="0">
-              <a:buNone/>
-            </a:pPr>
-            <a:r>
-              <a:rPr lang="en-US" sz="1700" dirty="0">
-                <a:solidFill>
-                  <a:srgbClr val="FFFFFF"/>
-                </a:solidFill>
-                <a:latin typeface="Arial" pitchFamily="34" charset="0"/>
-                <a:ea typeface="Arial" pitchFamily="34" charset="-122"/>
-                <a:cs typeface="Arial" pitchFamily="34" charset="-120"/>
-              </a:rPr>
-              <a:t>How can we measure exactly how acidic a liquid is?</a:t>
-            </a:r>
-            <a:endParaRPr lang="en-US" sz="1700" dirty="0"/>
-          </a:p>
-        </p:txBody>
-      </p:sp>
-      <p:sp>
-        <p:nvSpPr>
-          <p:cNvPr id="18" name="Text 16"/>
-          <p:cNvSpPr/>
-          <p:nvPr/>
-        </p:nvSpPr>
-        <p:spPr>
-          <a:xfrm>
-            <a:off x="11521440" y="6446520"/>
-            <a:ext cx="457200" cy="274320"/>
-          </a:xfrm>
-          <a:prstGeom prst="rect">
-            <a:avLst/>
-          </a:prstGeom>
-          <a:noFill/>
-          <a:ln/>
-        </p:spPr>
-        <p:txBody>
-          <a:bodyPr wrap="square" lIns="0" tIns="0" rIns="0" bIns="0" rtlCol="0" anchor="ctr"/>
-          <a:lstStyle/>
-          <a:p>
-            <a:pPr algn="r" indent="0" marL="0">
-              <a:buNone/>
-            </a:pPr>
-            <a:r>
-              <a:rPr lang="en-US" sz="1000" dirty="0">
-                <a:solidFill>
-                  <a:srgbClr val="C9B8E0"/>
-                </a:solidFill>
-                <a:latin typeface="Arial" pitchFamily="34" charset="0"/>
-                <a:ea typeface="Arial" pitchFamily="34" charset="-122"/>
-                <a:cs typeface="Arial" pitchFamily="34" charset="-120"/>
-              </a:rPr>
-              <a:t>10</a:t>
-            </a:r>
-            <a:endParaRPr lang="en-US" sz="1000" dirty="0"/>
-          </a:p>
-        </p:txBody>
-      </p:sp>
-    </p:spTree>
-  </p:cSld>
-  <p:clrMapOvr>
-    <a:masterClrMapping/>
-  </p:clrMapOvr>
-</p:sld>
-</file>
-
-<file path=ppt/slides/slide11.xml><?xml version="1.0" encoding="utf-8"?>
-<p:sld xmlns:a="http://schemas.openxmlformats.org/drawingml/2006/main" xmlns:r="http://schemas.openxmlformats.org/officeDocument/2006/relationships" xmlns:p="http://schemas.openxmlformats.org/presentationml/2006/main">
-  <p:cSld name="Slide 11">
-    <p:bg>
-      <p:bgPr>
-        <a:solidFill>
-          <a:srgbClr val="6A4C93"/>
-        </a:solidFill>
-      </p:bgPr>
-    </p:bg>
-    <p:spTree>
-      <p:nvGrpSpPr>
-        <p:cNvPr id="1" name=""/>
-        <p:cNvGrpSpPr/>
-        <p:nvPr/>
-      </p:nvGrpSpPr>
-      <p:grpSpPr>
-        <a:xfrm>
-          <a:off x="0" y="0"/>
-          <a:ext cx="0" cy="0"/>
-          <a:chOff x="0" y="0"/>
-          <a:chExt cx="0" cy="0"/>
-        </a:xfrm>
-      </p:grpSpPr>
-      <p:sp>
-        <p:nvSpPr>
-          <p:cNvPr id="2" name="Text 0"/>
-          <p:cNvSpPr/>
-          <p:nvPr/>
-        </p:nvSpPr>
-        <p:spPr>
-          <a:xfrm>
-            <a:off x="548640" y="365760"/>
-            <a:ext cx="6400800" cy="365760"/>
-          </a:xfrm>
-          <a:prstGeom prst="rect">
-            <a:avLst/>
-          </a:prstGeom>
-          <a:noFill/>
-          <a:ln/>
-        </p:spPr>
-        <p:txBody>
-          <a:bodyPr wrap="square" lIns="0" tIns="0" rIns="0" bIns="0" rtlCol="0" anchor="ctr"/>
-          <a:lstStyle/>
-          <a:p>
-            <a:pPr indent="0" marL="0">
-              <a:buNone/>
-            </a:pPr>
-            <a:r>
-              <a:rPr lang="en-US" sz="1300" b="1" spc="200" kern="0" dirty="0">
-                <a:solidFill>
-                  <a:srgbClr val="E0D6F0"/>
-                </a:solidFill>
-                <a:latin typeface="Arial" pitchFamily="34" charset="0"/>
-                <a:ea typeface="Arial" pitchFamily="34" charset="-122"/>
-                <a:cs typeface="Arial" pitchFamily="34" charset="-120"/>
-              </a:rPr>
-              <a:t>QUESTION 10 OF 10</a:t>
-            </a:r>
-            <a:endParaRPr lang="en-US" sz="1300" dirty="0"/>
-          </a:p>
-        </p:txBody>
-      </p:sp>
-      <p:sp>
-        <p:nvSpPr>
-          <p:cNvPr id="3" name="Shape 1"/>
-          <p:cNvSpPr/>
-          <p:nvPr/>
-        </p:nvSpPr>
-        <p:spPr>
-          <a:xfrm>
-            <a:off x="8138160" y="320040"/>
-            <a:ext cx="3474720" cy="365760"/>
-          </a:xfrm>
-          <a:prstGeom prst="roundRect">
-            <a:avLst>
-              <a:gd name="adj" fmla="val 15000"/>
-            </a:avLst>
-          </a:prstGeom>
-          <a:solidFill>
-            <a:srgbClr val="5A3F80"/>
-          </a:solidFill>
-          <a:ln/>
-        </p:spPr>
-      </p:sp>
-      <p:sp>
-        <p:nvSpPr>
-          <p:cNvPr id="4" name="Text 2"/>
-          <p:cNvSpPr/>
-          <p:nvPr/>
-        </p:nvSpPr>
-        <p:spPr>
-          <a:xfrm>
-            <a:off x="8138160" y="320040"/>
-            <a:ext cx="3474720" cy="365760"/>
-          </a:xfrm>
-          <a:prstGeom prst="rect">
-            <a:avLst/>
-          </a:prstGeom>
-          <a:noFill/>
-          <a:ln/>
-        </p:spPr>
-        <p:txBody>
-          <a:bodyPr wrap="square" lIns="0" tIns="0" rIns="0" bIns="0" rtlCol="0" anchor="ctr"/>
-          <a:lstStyle/>
-          <a:p>
-            <a:pPr algn="ctr" indent="0" marL="0">
-              <a:buNone/>
-            </a:pPr>
-            <a:r>
-              <a:rPr lang="en-US" sz="1100" i="1" dirty="0">
-                <a:solidFill>
-                  <a:srgbClr val="E0D6F0"/>
-                </a:solidFill>
-                <a:latin typeface="Arial" pitchFamily="34" charset="0"/>
-                <a:ea typeface="Arial" pitchFamily="34" charset="-122"/>
-                <a:cs typeface="Arial" pitchFamily="34" charset="-120"/>
-              </a:rPr>
-              <a:t>Use after: Model Building phase</a:t>
-            </a:r>
-            <a:endParaRPr lang="en-US" sz="1100" dirty="0"/>
-          </a:p>
-        </p:txBody>
-      </p:sp>
-      <p:sp>
-        <p:nvSpPr>
-          <p:cNvPr id="5" name="Text 3"/>
-          <p:cNvSpPr/>
-          <p:nvPr/>
-        </p:nvSpPr>
-        <p:spPr>
-          <a:xfrm>
-            <a:off x="548640" y="868680"/>
-            <a:ext cx="11064240" cy="1325880"/>
-          </a:xfrm>
-          <a:prstGeom prst="rect">
-            <a:avLst/>
-          </a:prstGeom>
-          <a:noFill/>
-          <a:ln/>
-        </p:spPr>
-        <p:txBody>
-          <a:bodyPr wrap="square" lIns="0" tIns="0" rIns="0" bIns="0" rtlCol="0" anchor="ctr"/>
-          <a:lstStyle/>
-          <a:p>
-            <a:pPr indent="0" marL="0">
-              <a:buNone/>
-            </a:pPr>
-            <a:r>
-              <a:rPr lang="en-US" sz="2300" b="1" dirty="0">
-                <a:solidFill>
-                  <a:srgbClr val="FFFFFF"/>
-                </a:solidFill>
-                <a:latin typeface="Arial" pitchFamily="34" charset="0"/>
-                <a:ea typeface="Arial" pitchFamily="34" charset="-122"/>
-                <a:cs typeface="Arial" pitchFamily="34" charset="-120"/>
-              </a:rPr>
-              <a:t>Revising your model using today's evidence, which set of labels is correct?</a:t>
-            </a:r>
-            <a:endParaRPr lang="en-US" sz="2300" dirty="0"/>
-          </a:p>
-        </p:txBody>
-      </p:sp>
-      <p:sp>
-        <p:nvSpPr>
-          <p:cNvPr id="6" name="Shape 4"/>
-          <p:cNvSpPr/>
-          <p:nvPr/>
-        </p:nvSpPr>
-        <p:spPr>
-          <a:xfrm>
-            <a:off x="731520" y="2331720"/>
-            <a:ext cx="10698480" cy="777240"/>
-          </a:xfrm>
-          <a:prstGeom prst="roundRect">
-            <a:avLst>
-              <a:gd name="adj" fmla="val 9412"/>
-            </a:avLst>
-          </a:prstGeom>
-          <a:solidFill>
-            <a:srgbClr val="7C5CAA"/>
-          </a:solidFill>
-          <a:ln/>
-        </p:spPr>
-      </p:sp>
-      <p:sp>
-        <p:nvSpPr>
-          <p:cNvPr id="7" name="Text 5"/>
-          <p:cNvSpPr/>
-          <p:nvPr/>
-        </p:nvSpPr>
-        <p:spPr>
-          <a:xfrm>
-            <a:off x="914400" y="2331720"/>
-            <a:ext cx="548640" cy="777240"/>
-          </a:xfrm>
-          <a:prstGeom prst="rect">
-            <a:avLst/>
-          </a:prstGeom>
-          <a:noFill/>
-          <a:ln/>
-        </p:spPr>
-        <p:txBody>
-          <a:bodyPr wrap="square" lIns="0" tIns="0" rIns="0" bIns="0" rtlCol="0" anchor="ctr"/>
-          <a:lstStyle/>
-          <a:p>
-            <a:pPr indent="0" marL="0">
-              <a:buNone/>
-            </a:pPr>
-            <a:r>
-              <a:rPr lang="en-US" sz="1800" b="1" dirty="0">
-                <a:solidFill>
-                  <a:srgbClr val="FFFFFF"/>
-                </a:solidFill>
-                <a:latin typeface="Arial" pitchFamily="34" charset="0"/>
-                <a:ea typeface="Arial" pitchFamily="34" charset="-122"/>
-                <a:cs typeface="Arial" pitchFamily="34" charset="-120"/>
-              </a:rPr>
-              <a:t>A</a:t>
-            </a:r>
-            <a:endParaRPr lang="en-US" sz="1800" dirty="0"/>
-          </a:p>
-        </p:txBody>
-      </p:sp>
-      <p:sp>
-        <p:nvSpPr>
-          <p:cNvPr id="8" name="Text 6"/>
-          <p:cNvSpPr/>
-          <p:nvPr/>
-        </p:nvSpPr>
-        <p:spPr>
-          <a:xfrm>
-            <a:off x="1554480" y="2331720"/>
-            <a:ext cx="9692640" cy="777240"/>
-          </a:xfrm>
-          <a:prstGeom prst="rect">
-            <a:avLst/>
-          </a:prstGeom>
-          <a:noFill/>
-          <a:ln/>
-        </p:spPr>
-        <p:txBody>
-          <a:bodyPr wrap="square" lIns="0" tIns="0" rIns="0" bIns="0" rtlCol="0" anchor="ctr"/>
-          <a:lstStyle/>
-          <a:p>
-            <a:pPr indent="0" marL="0">
-              <a:buNone/>
-            </a:pPr>
-            <a:r>
-              <a:rPr lang="en-US" sz="1700" dirty="0">
-                <a:solidFill>
-                  <a:srgbClr val="FFFFFF"/>
-                </a:solidFill>
-                <a:latin typeface="Arial" pitchFamily="34" charset="0"/>
-                <a:ea typeface="Arial" pitchFamily="34" charset="-122"/>
-                <a:cs typeface="Arial" pitchFamily="34" charset="-120"/>
-              </a:rPr>
-              <a:t>Lemon juice: neutral; baking soda solution: base; tap water: acid</a:t>
-            </a:r>
-            <a:endParaRPr lang="en-US" sz="1700" dirty="0"/>
-          </a:p>
-        </p:txBody>
-      </p:sp>
-      <p:sp>
-        <p:nvSpPr>
-          <p:cNvPr id="9" name="Shape 7"/>
-          <p:cNvSpPr/>
-          <p:nvPr/>
-        </p:nvSpPr>
-        <p:spPr>
-          <a:xfrm>
-            <a:off x="731520" y="3246120"/>
-            <a:ext cx="10698480" cy="777240"/>
-          </a:xfrm>
-          <a:prstGeom prst="roundRect">
-            <a:avLst>
-              <a:gd name="adj" fmla="val 9412"/>
-            </a:avLst>
-          </a:prstGeom>
-          <a:solidFill>
-            <a:srgbClr val="7C5CAA"/>
-          </a:solidFill>
-          <a:ln/>
-        </p:spPr>
-      </p:sp>
-      <p:sp>
-        <p:nvSpPr>
-          <p:cNvPr id="10" name="Text 8"/>
-          <p:cNvSpPr/>
-          <p:nvPr/>
-        </p:nvSpPr>
-        <p:spPr>
-          <a:xfrm>
-            <a:off x="914400" y="3246120"/>
-            <a:ext cx="548640" cy="777240"/>
-          </a:xfrm>
-          <a:prstGeom prst="rect">
-            <a:avLst/>
-          </a:prstGeom>
-          <a:noFill/>
-          <a:ln/>
-        </p:spPr>
-        <p:txBody>
-          <a:bodyPr wrap="square" lIns="0" tIns="0" rIns="0" bIns="0" rtlCol="0" anchor="ctr"/>
-          <a:lstStyle/>
-          <a:p>
-            <a:pPr indent="0" marL="0">
-              <a:buNone/>
-            </a:pPr>
-            <a:r>
-              <a:rPr lang="en-US" sz="1800" b="1" dirty="0">
-                <a:solidFill>
-                  <a:srgbClr val="FFFFFF"/>
-                </a:solidFill>
-                <a:latin typeface="Arial" pitchFamily="34" charset="0"/>
-                <a:ea typeface="Arial" pitchFamily="34" charset="-122"/>
-                <a:cs typeface="Arial" pitchFamily="34" charset="-120"/>
-              </a:rPr>
-              <a:t>B</a:t>
-            </a:r>
-            <a:endParaRPr lang="en-US" sz="1800" dirty="0"/>
-          </a:p>
-        </p:txBody>
-      </p:sp>
-      <p:sp>
-        <p:nvSpPr>
-          <p:cNvPr id="11" name="Text 9"/>
-          <p:cNvSpPr/>
-          <p:nvPr/>
-        </p:nvSpPr>
-        <p:spPr>
-          <a:xfrm>
-            <a:off x="1554480" y="3246120"/>
-            <a:ext cx="9692640" cy="777240"/>
-          </a:xfrm>
-          <a:prstGeom prst="rect">
-            <a:avLst/>
-          </a:prstGeom>
-          <a:noFill/>
-          <a:ln/>
-        </p:spPr>
-        <p:txBody>
-          <a:bodyPr wrap="square" lIns="0" tIns="0" rIns="0" bIns="0" rtlCol="0" anchor="ctr"/>
-          <a:lstStyle/>
-          <a:p>
-            <a:pPr indent="0" marL="0">
-              <a:buNone/>
-            </a:pPr>
-            <a:r>
-              <a:rPr lang="en-US" sz="1700" dirty="0">
-                <a:solidFill>
-                  <a:srgbClr val="FFFFFF"/>
-                </a:solidFill>
-                <a:latin typeface="Arial" pitchFamily="34" charset="0"/>
-                <a:ea typeface="Arial" pitchFamily="34" charset="-122"/>
-                <a:cs typeface="Arial" pitchFamily="34" charset="-120"/>
-              </a:rPr>
-              <a:t>Lemon juice: acid; baking soda solution: base; tap water: neutral</a:t>
-            </a:r>
-            <a:endParaRPr lang="en-US" sz="1700" dirty="0"/>
-          </a:p>
-        </p:txBody>
-      </p:sp>
-      <p:sp>
-        <p:nvSpPr>
-          <p:cNvPr id="12" name="Shape 10"/>
-          <p:cNvSpPr/>
-          <p:nvPr/>
-        </p:nvSpPr>
-        <p:spPr>
-          <a:xfrm>
-            <a:off x="731520" y="4160520"/>
-            <a:ext cx="10698480" cy="777240"/>
-          </a:xfrm>
-          <a:prstGeom prst="roundRect">
-            <a:avLst>
-              <a:gd name="adj" fmla="val 9412"/>
-            </a:avLst>
-          </a:prstGeom>
-          <a:solidFill>
-            <a:srgbClr val="7C5CAA"/>
-          </a:solidFill>
-          <a:ln/>
-        </p:spPr>
-      </p:sp>
-      <p:sp>
-        <p:nvSpPr>
-          <p:cNvPr id="13" name="Text 11"/>
-          <p:cNvSpPr/>
-          <p:nvPr/>
-        </p:nvSpPr>
-        <p:spPr>
-          <a:xfrm>
-            <a:off x="914400" y="4160520"/>
-            <a:ext cx="548640" cy="777240"/>
-          </a:xfrm>
-          <a:prstGeom prst="rect">
-            <a:avLst/>
-          </a:prstGeom>
-          <a:noFill/>
-          <a:ln/>
-        </p:spPr>
-        <p:txBody>
-          <a:bodyPr wrap="square" lIns="0" tIns="0" rIns="0" bIns="0" rtlCol="0" anchor="ctr"/>
-          <a:lstStyle/>
-          <a:p>
-            <a:pPr indent="0" marL="0">
-              <a:buNone/>
-            </a:pPr>
-            <a:r>
-              <a:rPr lang="en-US" sz="1800" b="1" dirty="0">
-                <a:solidFill>
-                  <a:srgbClr val="FFFFFF"/>
-                </a:solidFill>
-                <a:latin typeface="Arial" pitchFamily="34" charset="0"/>
-                <a:ea typeface="Arial" pitchFamily="34" charset="-122"/>
-                <a:cs typeface="Arial" pitchFamily="34" charset="-120"/>
-              </a:rPr>
-              <a:t>C</a:t>
-            </a:r>
-            <a:endParaRPr lang="en-US" sz="1800" dirty="0"/>
-          </a:p>
-        </p:txBody>
-      </p:sp>
-      <p:sp>
-        <p:nvSpPr>
-          <p:cNvPr id="14" name="Text 12"/>
-          <p:cNvSpPr/>
-          <p:nvPr/>
-        </p:nvSpPr>
-        <p:spPr>
-          <a:xfrm>
-            <a:off x="1554480" y="4160520"/>
-            <a:ext cx="9692640" cy="777240"/>
-          </a:xfrm>
-          <a:prstGeom prst="rect">
-            <a:avLst/>
-          </a:prstGeom>
-          <a:noFill/>
-          <a:ln/>
-        </p:spPr>
-        <p:txBody>
-          <a:bodyPr wrap="square" lIns="0" tIns="0" rIns="0" bIns="0" rtlCol="0" anchor="ctr"/>
-          <a:lstStyle/>
-          <a:p>
-            <a:pPr indent="0" marL="0">
-              <a:buNone/>
-            </a:pPr>
-            <a:r>
-              <a:rPr lang="en-US" sz="1700" dirty="0">
-                <a:solidFill>
-                  <a:srgbClr val="FFFFFF"/>
-                </a:solidFill>
-                <a:latin typeface="Arial" pitchFamily="34" charset="0"/>
-                <a:ea typeface="Arial" pitchFamily="34" charset="-122"/>
-                <a:cs typeface="Arial" pitchFamily="34" charset="-120"/>
-              </a:rPr>
-              <a:t>Lemon juice: base; baking soda solution: acid; tap water: neutral</a:t>
-            </a:r>
-            <a:endParaRPr lang="en-US" sz="1700" dirty="0"/>
-          </a:p>
-        </p:txBody>
-      </p:sp>
-      <p:sp>
-        <p:nvSpPr>
-          <p:cNvPr id="15" name="Shape 13"/>
-          <p:cNvSpPr/>
-          <p:nvPr/>
-        </p:nvSpPr>
-        <p:spPr>
-          <a:xfrm>
-            <a:off x="731520" y="5074920"/>
-            <a:ext cx="10698480" cy="777240"/>
-          </a:xfrm>
-          <a:prstGeom prst="roundRect">
-            <a:avLst>
-              <a:gd name="adj" fmla="val 9412"/>
-            </a:avLst>
-          </a:prstGeom>
-          <a:solidFill>
-            <a:srgbClr val="7C5CAA"/>
-          </a:solidFill>
-          <a:ln/>
-        </p:spPr>
-      </p:sp>
-      <p:sp>
-        <p:nvSpPr>
-          <p:cNvPr id="16" name="Text 14"/>
-          <p:cNvSpPr/>
-          <p:nvPr/>
-        </p:nvSpPr>
-        <p:spPr>
-          <a:xfrm>
-            <a:off x="914400" y="5074920"/>
-            <a:ext cx="548640" cy="777240"/>
-          </a:xfrm>
-          <a:prstGeom prst="rect">
-            <a:avLst/>
-          </a:prstGeom>
-          <a:noFill/>
-          <a:ln/>
-        </p:spPr>
-        <p:txBody>
-          <a:bodyPr wrap="square" lIns="0" tIns="0" rIns="0" bIns="0" rtlCol="0" anchor="ctr"/>
-          <a:lstStyle/>
-          <a:p>
-            <a:pPr indent="0" marL="0">
-              <a:buNone/>
-            </a:pPr>
-            <a:r>
-              <a:rPr lang="en-US" sz="1800" b="1" dirty="0">
-                <a:solidFill>
-                  <a:srgbClr val="FFFFFF"/>
-                </a:solidFill>
-                <a:latin typeface="Arial" pitchFamily="34" charset="0"/>
-                <a:ea typeface="Arial" pitchFamily="34" charset="-122"/>
-                <a:cs typeface="Arial" pitchFamily="34" charset="-120"/>
-              </a:rPr>
-              <a:t>D</a:t>
-            </a:r>
-            <a:endParaRPr lang="en-US" sz="1800" dirty="0"/>
-          </a:p>
-        </p:txBody>
-      </p:sp>
-      <p:sp>
-        <p:nvSpPr>
-          <p:cNvPr id="17" name="Text 15"/>
-          <p:cNvSpPr/>
-          <p:nvPr/>
-        </p:nvSpPr>
-        <p:spPr>
-          <a:xfrm>
-            <a:off x="1554480" y="5074920"/>
-            <a:ext cx="9692640" cy="777240"/>
-          </a:xfrm>
-          <a:prstGeom prst="rect">
-            <a:avLst/>
-          </a:prstGeom>
-          <a:noFill/>
-          <a:ln/>
-        </p:spPr>
-        <p:txBody>
-          <a:bodyPr wrap="square" lIns="0" tIns="0" rIns="0" bIns="0" rtlCol="0" anchor="ctr"/>
-          <a:lstStyle/>
-          <a:p>
-            <a:pPr indent="0" marL="0">
-              <a:buNone/>
-            </a:pPr>
-            <a:r>
-              <a:rPr lang="en-US" sz="1700" dirty="0">
-                <a:solidFill>
-                  <a:srgbClr val="FFFFFF"/>
-                </a:solidFill>
-                <a:latin typeface="Arial" pitchFamily="34" charset="0"/>
-                <a:ea typeface="Arial" pitchFamily="34" charset="-122"/>
-                <a:cs typeface="Arial" pitchFamily="34" charset="-120"/>
-              </a:rPr>
-              <a:t>Lemon juice: acid; baking soda solution: neutral; tap water: base</a:t>
-            </a:r>
-            <a:endParaRPr lang="en-US" sz="1700" dirty="0"/>
-          </a:p>
-        </p:txBody>
-      </p:sp>
-      <p:sp>
-        <p:nvSpPr>
-          <p:cNvPr id="18" name="Text 16"/>
-          <p:cNvSpPr/>
-          <p:nvPr/>
-        </p:nvSpPr>
-        <p:spPr>
-          <a:xfrm>
-            <a:off x="11521440" y="6446520"/>
-            <a:ext cx="457200" cy="274320"/>
-          </a:xfrm>
-          <a:prstGeom prst="rect">
-            <a:avLst/>
-          </a:prstGeom>
-          <a:noFill/>
-          <a:ln/>
-        </p:spPr>
-        <p:txBody>
-          <a:bodyPr wrap="square" lIns="0" tIns="0" rIns="0" bIns="0" rtlCol="0" anchor="ctr"/>
-          <a:lstStyle/>
-          <a:p>
-            <a:pPr algn="r" indent="0" marL="0">
-              <a:buNone/>
-            </a:pPr>
-            <a:r>
-              <a:rPr lang="en-US" sz="1000" dirty="0">
-                <a:solidFill>
-                  <a:srgbClr val="C9B8E0"/>
-                </a:solidFill>
-                <a:latin typeface="Arial" pitchFamily="34" charset="0"/>
-                <a:ea typeface="Arial" pitchFamily="34" charset="-122"/>
-                <a:cs typeface="Arial" pitchFamily="34" charset="-120"/>
-              </a:rPr>
-              <a:t>11</a:t>
-            </a:r>
-            <a:endParaRPr lang="en-US" sz="1000" dirty="0"/>
-          </a:p>
-        </p:txBody>
-      </p:sp>
-    </p:spTree>
-  </p:cSld>
-  <p:clrMapOvr>
-    <a:masterClrMapping/>
-  </p:clrMapOvr>
-</p:sld>
-</file>
-
-<file path=ppt/slides/slide12.xml><?xml version="1.0" encoding="utf-8"?>
-<p:sld xmlns:a="http://schemas.openxmlformats.org/drawingml/2006/main" xmlns:r="http://schemas.openxmlformats.org/officeDocument/2006/relationships" xmlns:p="http://schemas.openxmlformats.org/presentationml/2006/main">
-  <p:cSld name="Slide 12">
-    <p:bg>
-      <p:bgPr>
-        <a:solidFill>
-          <a:srgbClr val="1F3864"/>
-        </a:solidFill>
-      </p:bgPr>
-    </p:bg>
-    <p:spTree>
-      <p:nvGrpSpPr>
-        <p:cNvPr id="1" name=""/>
-        <p:cNvGrpSpPr/>
-        <p:nvPr/>
-      </p:nvGrpSpPr>
-      <p:grpSpPr>
-        <a:xfrm>
-          <a:off x="0" y="0"/>
-          <a:ext cx="0" cy="0"/>
-          <a:chOff x="0" y="0"/>
-          <a:chExt cx="0" cy="0"/>
-        </a:xfrm>
-      </p:grpSpPr>
-      <p:sp>
-        <p:nvSpPr>
-          <p:cNvPr id="2" name="Text 0"/>
-          <p:cNvSpPr/>
-          <p:nvPr/>
-        </p:nvSpPr>
-        <p:spPr>
-          <a:xfrm>
-            <a:off x="731520" y="2194560"/>
-            <a:ext cx="10698480" cy="822960"/>
-          </a:xfrm>
-          <a:prstGeom prst="rect">
-            <a:avLst/>
-          </a:prstGeom>
-          <a:noFill/>
-          <a:ln/>
-        </p:spPr>
-        <p:txBody>
-          <a:bodyPr wrap="square" lIns="0" tIns="0" rIns="0" bIns="0" rtlCol="0" anchor="ctr"/>
-          <a:lstStyle/>
-          <a:p>
-            <a:pPr indent="0" marL="0">
-              <a:buNone/>
-            </a:pPr>
-            <a:r>
-              <a:rPr lang="en-US" sz="3400" b="1" dirty="0">
-                <a:solidFill>
-                  <a:srgbClr val="FFFFFF"/>
-                </a:solidFill>
-                <a:latin typeface="Arial" pitchFamily="34" charset="0"/>
-                <a:ea typeface="Arial" pitchFamily="34" charset="-122"/>
-                <a:cs typeface="Arial" pitchFamily="34" charset="-120"/>
-              </a:rPr>
-              <a:t>All done</a:t>
-            </a:r>
-            <a:endParaRPr lang="en-US" sz="3400" dirty="0"/>
-          </a:p>
-        </p:txBody>
-      </p:sp>
-      <p:sp>
-        <p:nvSpPr>
-          <p:cNvPr id="3" name="Text 1"/>
-          <p:cNvSpPr/>
-          <p:nvPr/>
-        </p:nvSpPr>
-        <p:spPr>
-          <a:xfrm>
-            <a:off x="731520" y="3108960"/>
-            <a:ext cx="10698480" cy="731520"/>
-          </a:xfrm>
-          <a:prstGeom prst="rect">
-            <a:avLst/>
-          </a:prstGeom>
-          <a:noFill/>
-          <a:ln/>
-        </p:spPr>
-        <p:txBody>
-          <a:bodyPr wrap="square" lIns="0" tIns="0" rIns="0" bIns="0" rtlCol="0" anchor="ctr"/>
-          <a:lstStyle/>
-          <a:p>
-            <a:pPr indent="0" marL="0">
-              <a:buNone/>
-            </a:pPr>
-            <a:r>
-              <a:rPr lang="en-US" sz="1800" dirty="0">
-                <a:solidFill>
-                  <a:srgbClr val="D9EEF1"/>
-                </a:solidFill>
-                <a:latin typeface="Arial" pitchFamily="34" charset="0"/>
-                <a:ea typeface="Arial" pitchFamily="34" charset="-122"/>
-                <a:cs typeface="Arial" pitchFamily="34" charset="-120"/>
-              </a:rPr>
-              <a:t>Ask your teacher how to submit your answers today (for example, on a paper answer slip).</a:t>
-            </a:r>
-            <a:endParaRPr lang="en-US" sz="1800" dirty="0"/>
           </a:p>
         </p:txBody>
       </p:sp>
@@ -3518,7 +1921,7 @@
                 <a:ea typeface="Arial" pitchFamily="34" charset="-122"/>
                 <a:cs typeface="Arial" pitchFamily="34" charset="-120"/>
               </a:rPr>
-              <a:t>QUESTION 1 OF 10</a:t>
+              <a:t>QUESTION 1 OF 7</a:t>
             </a:r>
             <a:endParaRPr lang="en-US" sz="1300" dirty="0"/>
           </a:p>
@@ -3618,7 +2021,7 @@
                 <a:ea typeface="Arial" pitchFamily="34" charset="-122"/>
                 <a:cs typeface="Arial" pitchFamily="34" charset="-120"/>
               </a:rPr>
-              <a:t>Before the experiment, Wanjiku predicts what clean tap water will do to litmus paper. Which prediction fits a neutral liquid?</a:t>
+              <a:t>Two partners disagree about what colour methyl orange will turn in baking soda solution. Before testing, what is the best way to settle the disagreement?</a:t>
             </a:r>
             <a:endParaRPr lang="en-US" sz="2000" dirty="0"/>
           </a:p>
@@ -3718,7 +2121,7 @@
                 <a:ea typeface="Arial" pitchFamily="34" charset="-122"/>
                 <a:cs typeface="Arial" pitchFamily="34" charset="-120"/>
               </a:rPr>
-              <a:t>Blue litmus turns red and red litmus stays red</a:t>
+              <a:t>Carry out the test and record the colour actually seen</a:t>
             </a:r>
             <a:endParaRPr lang="en-US" sz="1700" dirty="0"/>
           </a:p>
@@ -3818,7 +2221,7 @@
                 <a:ea typeface="Arial" pitchFamily="34" charset="-122"/>
                 <a:cs typeface="Arial" pitchFamily="34" charset="-120"/>
               </a:rPr>
-              <a:t>Neither red litmus nor blue litmus changes colour</a:t>
+              <a:t>Ask the teacher to say which prediction is right</a:t>
             </a:r>
             <a:endParaRPr lang="en-US" sz="1700" dirty="0"/>
           </a:p>
@@ -3918,7 +2321,7 @@
                 <a:ea typeface="Arial" pitchFamily="34" charset="-122"/>
                 <a:cs typeface="Arial" pitchFamily="34" charset="-120"/>
               </a:rPr>
-              <a:t>Both red litmus and blue litmus turn purple</a:t>
+              <a:t>Vote and go with the answer most students choose</a:t>
             </a:r>
             <a:endParaRPr lang="en-US" sz="1700" dirty="0"/>
           </a:p>
@@ -4018,7 +2421,7 @@
                 <a:ea typeface="Arial" pitchFamily="34" charset="-122"/>
                 <a:cs typeface="Arial" pitchFamily="34" charset="-120"/>
               </a:rPr>
-              <a:t>Red litmus turns blue and blue litmus stays blue</a:t>
+              <a:t>Let the student who is more confident decide</a:t>
             </a:r>
             <a:endParaRPr lang="en-US" sz="1700" dirty="0"/>
           </a:p>
@@ -4128,7 +2531,7 @@
                 <a:ea typeface="Arial" pitchFamily="34" charset="-122"/>
                 <a:cs typeface="Arial" pitchFamily="34" charset="-120"/>
               </a:rPr>
-              <a:t>QUESTION 2 OF 10</a:t>
+              <a:t>QUESTION 2 OF 7</a:t>
             </a:r>
             <a:endParaRPr lang="en-US" sz="1300" dirty="0"/>
           </a:p>
@@ -4228,7 +2631,7 @@
                 <a:ea typeface="Arial" pitchFamily="34" charset="-122"/>
                 <a:cs typeface="Arial" pitchFamily="34" charset="-120"/>
               </a:rPr>
-              <a:t>In the practical, a group adds 2–3 drops of freshly squeezed lemon juice to a strip of blue litmus paper. What colour does the strip turn?</a:t>
+              <a:t>In Experiment 1, a student puts 2-3 drops of freshly squeezed lemon juice on a strip of blue litmus paper. What colour does the paper turn?</a:t>
             </a:r>
             <a:endParaRPr lang="en-US" sz="2000" dirty="0"/>
           </a:p>
@@ -4328,7 +2731,7 @@
                 <a:ea typeface="Arial" pitchFamily="34" charset="-122"/>
                 <a:cs typeface="Arial" pitchFamily="34" charset="-120"/>
               </a:rPr>
-              <a:t>It stays blue</a:t>
+              <a:t>Red</a:t>
             </a:r>
             <a:endParaRPr lang="en-US" sz="1700" dirty="0"/>
           </a:p>
@@ -4428,7 +2831,7 @@
                 <a:ea typeface="Arial" pitchFamily="34" charset="-122"/>
                 <a:cs typeface="Arial" pitchFamily="34" charset="-120"/>
               </a:rPr>
-              <a:t>It turns red</a:t>
+              <a:t>Blue (no change)</a:t>
             </a:r>
             <a:endParaRPr lang="en-US" sz="1700" dirty="0"/>
           </a:p>
@@ -4528,7 +2931,7 @@
                 <a:ea typeface="Arial" pitchFamily="34" charset="-122"/>
                 <a:cs typeface="Arial" pitchFamily="34" charset="-120"/>
               </a:rPr>
-              <a:t>It turns pink</a:t>
+              <a:t>Pink</a:t>
             </a:r>
             <a:endParaRPr lang="en-US" sz="1700" dirty="0"/>
           </a:p>
@@ -4628,7 +3031,7 @@
                 <a:ea typeface="Arial" pitchFamily="34" charset="-122"/>
                 <a:cs typeface="Arial" pitchFamily="34" charset="-120"/>
               </a:rPr>
-              <a:t>It turns colourless</a:t>
+              <a:t>Colourless</a:t>
             </a:r>
             <a:endParaRPr lang="en-US" sz="1700" dirty="0"/>
           </a:p>
@@ -4738,7 +3141,7 @@
                 <a:ea typeface="Arial" pitchFamily="34" charset="-122"/>
                 <a:cs typeface="Arial" pitchFamily="34" charset="-120"/>
               </a:rPr>
-              <a:t>QUESTION 3 OF 10</a:t>
+              <a:t>QUESTION 3 OF 7</a:t>
             </a:r>
             <a:endParaRPr lang="en-US" sz="1300" dirty="0"/>
           </a:p>
@@ -4830,7 +3233,7 @@
               <a:buNone/>
             </a:pPr>
             <a:r>
-              <a:rPr lang="en-US" sz="2300" b="1" dirty="0">
+              <a:rPr lang="en-US" sz="2000" b="1" dirty="0">
                 <a:solidFill>
                   <a:srgbClr val="FFFFFF"/>
                 </a:solidFill>
@@ -4838,9 +3241,9 @@
                 <a:ea typeface="Arial" pitchFamily="34" charset="-122"/>
                 <a:cs typeface="Arial" pitchFamily="34" charset="-120"/>
               </a:rPr>
-              <a:t>A group adds 2 drops of phenolphthalein to 5 drops of liquid handwashing soap solution. What colour do they see?</a:t>
-            </a:r>
-            <a:endParaRPr lang="en-US" sz="2300" dirty="0"/>
+              <a:t>A group predicted that cow's milk would be strongly basic. Their litmus and indicator results do not match this prediction. What should the recorders do?</a:t>
+            </a:r>
+            <a:endParaRPr lang="en-US" sz="2000" dirty="0"/>
           </a:p>
         </p:txBody>
       </p:sp>
@@ -4938,7 +3341,7 @@
                 <a:ea typeface="Arial" pitchFamily="34" charset="-122"/>
                 <a:cs typeface="Arial" pitchFamily="34" charset="-120"/>
               </a:rPr>
-              <a:t>Red</a:t>
+              <a:t>Write down the colours exactly as seen, even if they differ from the prediction</a:t>
             </a:r>
             <a:endParaRPr lang="en-US" sz="1700" dirty="0"/>
           </a:p>
@@ -5038,7 +3441,7 @@
                 <a:ea typeface="Arial" pitchFamily="34" charset="-122"/>
                 <a:cs typeface="Arial" pitchFamily="34" charset="-120"/>
               </a:rPr>
-              <a:t>Yellow</a:t>
+              <a:t>Leave the milk row blank because the result was unexpected</a:t>
             </a:r>
             <a:endParaRPr lang="en-US" sz="1700" dirty="0"/>
           </a:p>
@@ -5138,7 +3541,7 @@
                 <a:ea typeface="Arial" pitchFamily="34" charset="-122"/>
                 <a:cs typeface="Arial" pitchFamily="34" charset="-120"/>
               </a:rPr>
-              <a:t>Pink/magenta</a:t>
+              <a:t>Copy the results from another group's table</a:t>
             </a:r>
             <a:endParaRPr lang="en-US" sz="1700" dirty="0"/>
           </a:p>
@@ -5238,7 +3641,7 @@
                 <a:ea typeface="Arial" pitchFamily="34" charset="-122"/>
                 <a:cs typeface="Arial" pitchFamily="34" charset="-120"/>
               </a:rPr>
-              <a:t>Colourless</a:t>
+              <a:t>Change the results in the table to match the prediction</a:t>
             </a:r>
             <a:endParaRPr lang="en-US" sz="1700" dirty="0"/>
           </a:p>
@@ -5348,7 +3751,7 @@
                 <a:ea typeface="Arial" pitchFamily="34" charset="-122"/>
                 <a:cs typeface="Arial" pitchFamily="34" charset="-120"/>
               </a:rPr>
-              <a:t>QUESTION 4 OF 10</a:t>
+              <a:t>QUESTION 4 OF 7</a:t>
             </a:r>
             <a:endParaRPr lang="en-US" sz="1300" dirty="0"/>
           </a:p>
@@ -5409,7 +3812,7 @@
                 <a:ea typeface="Arial" pitchFamily="34" charset="-122"/>
                 <a:cs typeface="Arial" pitchFamily="34" charset="-120"/>
               </a:rPr>
-              <a:t>Use after: Observe phase</a:t>
+              <a:t>Use after: Explain phase</a:t>
             </a:r>
             <a:endParaRPr lang="en-US" sz="1100" dirty="0"/>
           </a:p>
@@ -5448,7 +3851,7 @@
                 <a:ea typeface="Arial" pitchFamily="34" charset="-122"/>
                 <a:cs typeface="Arial" pitchFamily="34" charset="-120"/>
               </a:rPr>
-              <a:t>A group adds 2 drops of methyl orange to white vinegar (siki). What colour should they record?</a:t>
+              <a:t>Liquid soap solution turns red litmus paper blue and turns phenolphthalein pink. How should it be classified, and why?</a:t>
             </a:r>
             <a:endParaRPr lang="en-US" sz="2300" dirty="0"/>
           </a:p>
@@ -5548,7 +3951,7 @@
                 <a:ea typeface="Arial" pitchFamily="34" charset="-122"/>
                 <a:cs typeface="Arial" pitchFamily="34" charset="-120"/>
               </a:rPr>
-              <a:t>Yellow</a:t>
+              <a:t>Acid, because it changes the colour of litmus paper</a:t>
             </a:r>
             <a:endParaRPr lang="en-US" sz="1700" dirty="0"/>
           </a:p>
@@ -5648,7 +4051,7 @@
                 <a:ea typeface="Arial" pitchFamily="34" charset="-122"/>
                 <a:cs typeface="Arial" pitchFamily="34" charset="-120"/>
               </a:rPr>
-              <a:t>Orange-yellow</a:t>
+              <a:t>Base, because red litmus turns blue and phenolphthalein turns pink</a:t>
             </a:r>
             <a:endParaRPr lang="en-US" sz="1700" dirty="0"/>
           </a:p>
@@ -5748,7 +4151,7 @@
                 <a:ea typeface="Arial" pitchFamily="34" charset="-122"/>
                 <a:cs typeface="Arial" pitchFamily="34" charset="-120"/>
               </a:rPr>
-              <a:t>Red</a:t>
+              <a:t>Neutral, because it does not make methyl orange red</a:t>
             </a:r>
             <a:endParaRPr lang="en-US" sz="1700" dirty="0"/>
           </a:p>
@@ -5848,7 +4251,7 @@
                 <a:ea typeface="Arial" pitchFamily="34" charset="-122"/>
                 <a:cs typeface="Arial" pitchFamily="34" charset="-120"/>
               </a:rPr>
-              <a:t>Colourless</a:t>
+              <a:t>Acid, because phenolphthalein changes colour</a:t>
             </a:r>
             <a:endParaRPr lang="en-US" sz="1700" dirty="0"/>
           </a:p>
@@ -5958,7 +4361,7 @@
                 <a:ea typeface="Arial" pitchFamily="34" charset="-122"/>
                 <a:cs typeface="Arial" pitchFamily="34" charset="-120"/>
               </a:rPr>
-              <a:t>QUESTION 5 OF 10</a:t>
+              <a:t>QUESTION 5 OF 7</a:t>
             </a:r>
             <a:endParaRPr lang="en-US" sz="1300" dirty="0"/>
           </a:p>
@@ -6019,7 +4422,7 @@
                 <a:ea typeface="Arial" pitchFamily="34" charset="-122"/>
                 <a:cs typeface="Arial" pitchFamily="34" charset="-120"/>
               </a:rPr>
-              <a:t>Use after: Observe phase</a:t>
+              <a:t>Use after: Explain phase</a:t>
             </a:r>
             <a:endParaRPr lang="en-US" sz="1100" dirty="0"/>
           </a:p>
@@ -6050,7 +4453,7 @@
               <a:buNone/>
             </a:pPr>
             <a:r>
-              <a:rPr lang="en-US" sz="1800" b="1" dirty="0">
+              <a:rPr lang="en-US" sz="2000" b="1" dirty="0">
                 <a:solidFill>
                   <a:srgbClr val="FFFFFF"/>
                 </a:solidFill>
@@ -6058,9 +4461,9 @@
                 <a:ea typeface="Arial" pitchFamily="34" charset="-122"/>
                 <a:cs typeface="Arial" pitchFamily="34" charset="-120"/>
               </a:rPr>
-              <a:t>Before testing, Otieno predicted that lemon juice would turn phenolphthalein pink. In the experiment, the lemon juice and phenolphthalein mixture stays colourless. What should Otieno write in his results table?</a:t>
-            </a:r>
-            <a:endParaRPr lang="en-US" sz="1800" dirty="0"/>
+              <a:t>A student tests tap water. Litmus paper shows no colour change, phenolphthalein stays colourless and methyl orange is orange-yellow. What is the best conclusion?</a:t>
+            </a:r>
+            <a:endParaRPr lang="en-US" sz="2000" dirty="0"/>
           </a:p>
         </p:txBody>
       </p:sp>
@@ -6158,7 +4561,7 @@
                 <a:ea typeface="Arial" pitchFamily="34" charset="-122"/>
                 <a:cs typeface="Arial" pitchFamily="34" charset="-120"/>
               </a:rPr>
-              <a:t>Colourless, because he must record exactly what he sees</a:t>
+              <a:t>It is neutral, because none of the indicators show an acid or base colour</a:t>
             </a:r>
             <a:endParaRPr lang="en-US" sz="1700" dirty="0"/>
           </a:p>
@@ -6258,7 +4661,7 @@
                 <a:ea typeface="Arial" pitchFamily="34" charset="-122"/>
                 <a:cs typeface="Arial" pitchFamily="34" charset="-120"/>
               </a:rPr>
-              <a:t>Nothing, because the test must have failed</a:t>
+              <a:t>It cannot be classified because no indicator turned red</a:t>
             </a:r>
             <a:endParaRPr lang="en-US" sz="1700" dirty="0"/>
           </a:p>
@@ -6358,7 +4761,7 @@
                 <a:ea typeface="Arial" pitchFamily="34" charset="-122"/>
                 <a:cs typeface="Arial" pitchFamily="34" charset="-120"/>
               </a:rPr>
-              <a:t>Pale pink, to be halfway between the prediction and the result</a:t>
+              <a:t>It is a base, because methyl orange is yellowish</a:t>
             </a:r>
             <a:endParaRPr lang="en-US" sz="1700" dirty="0"/>
           </a:p>
@@ -6458,7 +4861,7 @@
                 <a:ea typeface="Arial" pitchFamily="34" charset="-122"/>
                 <a:cs typeface="Arial" pitchFamily="34" charset="-120"/>
               </a:rPr>
-              <a:t>Pink, because that is what he predicted</a:t>
+              <a:t>It is an acid, because phenolphthalein is colourless</a:t>
             </a:r>
             <a:endParaRPr lang="en-US" sz="1700" dirty="0"/>
           </a:p>
@@ -6568,7 +4971,7 @@
                 <a:ea typeface="Arial" pitchFamily="34" charset="-122"/>
                 <a:cs typeface="Arial" pitchFamily="34" charset="-120"/>
               </a:rPr>
-              <a:t>QUESTION 6 OF 10</a:t>
+              <a:t>QUESTION 6 OF 7</a:t>
             </a:r>
             <a:endParaRPr lang="en-US" sz="1300" dirty="0"/>
           </a:p>
@@ -6629,7 +5032,7 @@
                 <a:ea typeface="Arial" pitchFamily="34" charset="-122"/>
                 <a:cs typeface="Arial" pitchFamily="34" charset="-120"/>
               </a:rPr>
-              <a:t>Use after: Explain phase</a:t>
+              <a:t>Use after: DQB phase</a:t>
             </a:r>
             <a:endParaRPr lang="en-US" sz="1100" dirty="0"/>
           </a:p>
@@ -6668,7 +5071,7 @@
                 <a:ea typeface="Arial" pitchFamily="34" charset="-122"/>
                 <a:cs typeface="Arial" pitchFamily="34" charset="-120"/>
               </a:rPr>
-              <a:t>A student tests lemon juice with red litmus paper and sees no colour change. She says, "The litmus did not work." Which explanation is correct?</a:t>
+              <a:t>After Experiment 1, students can tell whether a liquid is an acid, a base or neutral using indicators. Which question is still NOT answered by this experiment?</a:t>
             </a:r>
             <a:endParaRPr lang="en-US" sz="2000" dirty="0"/>
           </a:p>
@@ -6768,7 +5171,7 @@
                 <a:ea typeface="Arial" pitchFamily="34" charset="-122"/>
                 <a:cs typeface="Arial" pitchFamily="34" charset="-120"/>
               </a:rPr>
-              <a:t>She did not add enough drops, so the test cannot work</a:t>
+              <a:t>How do acids react, for example do they corrode or react with other substances?</a:t>
             </a:r>
             <a:endParaRPr lang="en-US" sz="1700" dirty="0"/>
           </a:p>
@@ -6868,7 +5271,7 @@
                 <a:ea typeface="Arial" pitchFamily="34" charset="-122"/>
                 <a:cs typeface="Arial" pitchFamily="34" charset="-120"/>
               </a:rPr>
-              <a:t>Acids turn litmus red, and red litmus is already red, so no change is seen</a:t>
+              <a:t>Is baking soda solution a base?</a:t>
             </a:r>
             <a:endParaRPr lang="en-US" sz="1700" dirty="0"/>
           </a:p>
@@ -6968,7 +5371,7 @@
                 <a:ea typeface="Arial" pitchFamily="34" charset="-122"/>
                 <a:cs typeface="Arial" pitchFamily="34" charset="-120"/>
               </a:rPr>
-              <a:t>Litmus paper only works on bases</a:t>
+              <a:t>What colour does phenolphthalein turn in a base?</a:t>
             </a:r>
             <a:endParaRPr lang="en-US" sz="1700" dirty="0"/>
           </a:p>
@@ -7068,7 +5471,7 @@
                 <a:ea typeface="Arial" pitchFamily="34" charset="-122"/>
                 <a:cs typeface="Arial" pitchFamily="34" charset="-120"/>
               </a:rPr>
-              <a:t>Lemon juice is neutral, so nothing happens</a:t>
+              <a:t>Is vinegar (siki) an acid?</a:t>
             </a:r>
             <a:endParaRPr lang="en-US" sz="1700" dirty="0"/>
           </a:p>
@@ -7178,7 +5581,7 @@
                 <a:ea typeface="Arial" pitchFamily="34" charset="-122"/>
                 <a:cs typeface="Arial" pitchFamily="34" charset="-120"/>
               </a:rPr>
-              <a:t>QUESTION 7 OF 10</a:t>
+              <a:t>QUESTION 7 OF 7</a:t>
             </a:r>
             <a:endParaRPr lang="en-US" sz="1300" dirty="0"/>
           </a:p>
@@ -7239,7 +5642,7 @@
                 <a:ea typeface="Arial" pitchFamily="34" charset="-122"/>
                 <a:cs typeface="Arial" pitchFamily="34" charset="-120"/>
               </a:rPr>
-              <a:t>Use after: Explain phase</a:t>
+              <a:t>Use after: Model Building phase</a:t>
             </a:r>
             <a:endParaRPr lang="en-US" sz="1100" dirty="0"/>
           </a:p>
@@ -7278,7 +5681,7 @@
                 <a:ea typeface="Arial" pitchFamily="34" charset="-122"/>
                 <a:cs typeface="Arial" pitchFamily="34" charset="-120"/>
               </a:rPr>
-              <a:t>A solution is tested with four indicators. Red litmus: no change. Blue litmus: no change. Phenolphthalein: colourless. Methyl orange: orange-yellow. How should the solution be classified?</a:t>
+              <a:t>A student revises a model by labelling the liquids tested in Experiment 1 using the evidence. Which set of labels is correct?</a:t>
             </a:r>
             <a:endParaRPr lang="en-US" sz="2000" dirty="0"/>
           </a:p>
@@ -7378,7 +5781,7 @@
                 <a:ea typeface="Arial" pitchFamily="34" charset="-122"/>
                 <a:cs typeface="Arial" pitchFamily="34" charset="-120"/>
               </a:rPr>
-              <a:t>Acid, because phenolphthalein is colourless</a:t>
+              <a:t>Lemon juice: base; baking soda solution: acid; tap water: neutral</a:t>
             </a:r>
             <a:endParaRPr lang="en-US" sz="1700" dirty="0"/>
           </a:p>
@@ -7478,7 +5881,7 @@
                 <a:ea typeface="Arial" pitchFamily="34" charset="-122"/>
                 <a:cs typeface="Arial" pitchFamily="34" charset="-120"/>
               </a:rPr>
-              <a:t>Base, because methyl orange is yellow-coloured</a:t>
+              <a:t>Lemon juice: neutral; baking soda solution: base; tap water: acid</a:t>
             </a:r>
             <a:endParaRPr lang="en-US" sz="1700" dirty="0"/>
           </a:p>
@@ -7578,7 +5981,7 @@
                 <a:ea typeface="Arial" pitchFamily="34" charset="-122"/>
                 <a:cs typeface="Arial" pitchFamily="34" charset="-120"/>
               </a:rPr>
-              <a:t>Neutral, because all the indicators show the neutral results</a:t>
+              <a:t>Lemon juice: acid; baking soda solution: neutral; tap water: base</a:t>
             </a:r>
             <a:endParaRPr lang="en-US" sz="1700" dirty="0"/>
           </a:p>
@@ -7678,7 +6081,7 @@
                 <a:ea typeface="Arial" pitchFamily="34" charset="-122"/>
                 <a:cs typeface="Arial" pitchFamily="34" charset="-120"/>
               </a:rPr>
-              <a:t>Base, because the litmus papers did not turn red</a:t>
+              <a:t>Lemon juice: acid; baking soda solution: base; tap water: neutral</a:t>
             </a:r>
             <a:endParaRPr lang="en-US" sz="1700" dirty="0"/>
           </a:p>
@@ -7737,7 +6140,7 @@
     <p:bg>
       <p:bgPr>
         <a:solidFill>
-          <a:srgbClr val="6A4C93"/>
+          <a:srgbClr val="1F3864"/>
         </a:solidFill>
       </p:bgPr>
     </p:bg>
@@ -7763,124 +6166,24 @@
         </p:nvSpPr>
         <p:spPr>
           <a:xfrm>
-            <a:off x="548640" y="365760"/>
-            <a:ext cx="6400800" cy="365760"/>
-          </a:xfrm>
-          <a:prstGeom prst="rect">
-            <a:avLst/>
-          </a:prstGeom>
-          <a:noFill/>
-          <a:ln/>
-        </p:spPr>
-        <p:txBody>
-          <a:bodyPr wrap="square" lIns="0" tIns="0" rIns="0" bIns="0" rtlCol="0" anchor="ctr"/>
-          <a:lstStyle/>
-          <a:p>
-            <a:pPr indent="0" marL="0">
-              <a:buNone/>
-            </a:pPr>
-            <a:r>
-              <a:rPr lang="en-US" sz="1300" b="1" spc="200" kern="0" dirty="0">
-                <a:solidFill>
-                  <a:srgbClr val="E0D6F0"/>
-                </a:solidFill>
-                <a:latin typeface="Arial" pitchFamily="34" charset="0"/>
-                <a:ea typeface="Arial" pitchFamily="34" charset="-122"/>
-                <a:cs typeface="Arial" pitchFamily="34" charset="-120"/>
-              </a:rPr>
-              <a:t>QUESTION 8 OF 10</a:t>
-            </a:r>
-            <a:endParaRPr lang="en-US" sz="1300" dirty="0"/>
-          </a:p>
-        </p:txBody>
-      </p:sp>
-      <p:sp>
-        <p:nvSpPr>
-          <p:cNvPr id="3" name="Shape 1"/>
-          <p:cNvSpPr/>
-          <p:nvPr/>
-        </p:nvSpPr>
-        <p:spPr>
-          <a:xfrm>
-            <a:off x="8138160" y="320040"/>
-            <a:ext cx="3474720" cy="365760"/>
-          </a:xfrm>
-          <a:prstGeom prst="roundRect">
-            <a:avLst>
-              <a:gd name="adj" fmla="val 15000"/>
-            </a:avLst>
-          </a:prstGeom>
-          <a:solidFill>
-            <a:srgbClr val="5A3F80"/>
-          </a:solidFill>
-          <a:ln/>
-        </p:spPr>
-      </p:sp>
-      <p:sp>
-        <p:nvSpPr>
-          <p:cNvPr id="4" name="Text 2"/>
-          <p:cNvSpPr/>
-          <p:nvPr/>
-        </p:nvSpPr>
-        <p:spPr>
-          <a:xfrm>
-            <a:off x="8138160" y="320040"/>
-            <a:ext cx="3474720" cy="365760"/>
-          </a:xfrm>
-          <a:prstGeom prst="rect">
-            <a:avLst/>
-          </a:prstGeom>
-          <a:noFill/>
-          <a:ln/>
-        </p:spPr>
-        <p:txBody>
-          <a:bodyPr wrap="square" lIns="0" tIns="0" rIns="0" bIns="0" rtlCol="0" anchor="ctr"/>
-          <a:lstStyle/>
-          <a:p>
-            <a:pPr algn="ctr" indent="0" marL="0">
-              <a:buNone/>
-            </a:pPr>
-            <a:r>
-              <a:rPr lang="en-US" sz="1100" i="1" dirty="0">
-                <a:solidFill>
-                  <a:srgbClr val="E0D6F0"/>
-                </a:solidFill>
-                <a:latin typeface="Arial" pitchFamily="34" charset="0"/>
-                <a:ea typeface="Arial" pitchFamily="34" charset="-122"/>
-                <a:cs typeface="Arial" pitchFamily="34" charset="-120"/>
-              </a:rPr>
-              <a:t>Use after: Explain phase</a:t>
-            </a:r>
-            <a:endParaRPr lang="en-US" sz="1100" dirty="0"/>
-          </a:p>
-        </p:txBody>
-      </p:sp>
-      <p:sp>
-        <p:nvSpPr>
-          <p:cNvPr id="5" name="Text 3"/>
-          <p:cNvSpPr/>
-          <p:nvPr/>
-        </p:nvSpPr>
-        <p:spPr>
-          <a:xfrm>
-            <a:off x="548640" y="868680"/>
-            <a:ext cx="11064240" cy="1325880"/>
-          </a:xfrm>
-          <a:prstGeom prst="rect">
-            <a:avLst/>
-          </a:prstGeom>
-          <a:noFill/>
-          <a:ln/>
-        </p:spPr>
-        <p:txBody>
-          <a:bodyPr wrap="square" lIns="0" tIns="0" rIns="0" bIns="0" rtlCol="0" anchor="ctr"/>
-          <a:lstStyle/>
-          <a:p>
-            <a:pPr indent="0" marL="0">
-              <a:buNone/>
-            </a:pPr>
-            <a:r>
-              <a:rPr lang="en-US" sz="2300" b="1" dirty="0">
+            <a:off x="731520" y="2194560"/>
+            <a:ext cx="10698480" cy="822960"/>
+          </a:xfrm>
+          <a:prstGeom prst="rect">
+            <a:avLst/>
+          </a:prstGeom>
+          <a:noFill/>
+          <a:ln/>
+        </p:spPr>
+        <p:txBody>
+          <a:bodyPr wrap="square" lIns="0" tIns="0" rIns="0" bIns="0" rtlCol="0" anchor="ctr"/>
+          <a:lstStyle/>
+          <a:p>
+            <a:pPr indent="0" marL="0">
+              <a:buNone/>
+            </a:pPr>
+            <a:r>
+              <a:rPr lang="en-US" sz="3400" b="1" dirty="0">
                 <a:solidFill>
                   <a:srgbClr val="FFFFFF"/>
                 </a:solidFill>
@@ -7888,448 +6191,48 @@
                 <a:ea typeface="Arial" pitchFamily="34" charset="-122"/>
                 <a:cs typeface="Arial" pitchFamily="34" charset="-120"/>
               </a:rPr>
-              <a:t>A student adds phenolphthalein to an unknown solution and it stays colourless. What can the student correctly conclude?</a:t>
-            </a:r>
-            <a:endParaRPr lang="en-US" sz="2300" dirty="0"/>
-          </a:p>
-        </p:txBody>
-      </p:sp>
-      <p:sp>
-        <p:nvSpPr>
-          <p:cNvPr id="6" name="Shape 4"/>
-          <p:cNvSpPr/>
-          <p:nvPr/>
-        </p:nvSpPr>
-        <p:spPr>
-          <a:xfrm>
-            <a:off x="731520" y="2331720"/>
-            <a:ext cx="10698480" cy="777240"/>
-          </a:xfrm>
-          <a:prstGeom prst="roundRect">
-            <a:avLst>
-              <a:gd name="adj" fmla="val 9412"/>
-            </a:avLst>
-          </a:prstGeom>
-          <a:solidFill>
-            <a:srgbClr val="7C5CAA"/>
-          </a:solidFill>
-          <a:ln/>
-        </p:spPr>
-      </p:sp>
-      <p:sp>
-        <p:nvSpPr>
-          <p:cNvPr id="7" name="Text 5"/>
-          <p:cNvSpPr/>
-          <p:nvPr/>
-        </p:nvSpPr>
-        <p:spPr>
-          <a:xfrm>
-            <a:off x="914400" y="2331720"/>
-            <a:ext cx="548640" cy="777240"/>
-          </a:xfrm>
-          <a:prstGeom prst="rect">
-            <a:avLst/>
-          </a:prstGeom>
-          <a:noFill/>
-          <a:ln/>
-        </p:spPr>
-        <p:txBody>
-          <a:bodyPr wrap="square" lIns="0" tIns="0" rIns="0" bIns="0" rtlCol="0" anchor="ctr"/>
-          <a:lstStyle/>
-          <a:p>
-            <a:pPr indent="0" marL="0">
-              <a:buNone/>
-            </a:pPr>
-            <a:r>
-              <a:rPr lang="en-US" sz="1800" b="1" dirty="0">
-                <a:solidFill>
-                  <a:srgbClr val="FFFFFF"/>
-                </a:solidFill>
-                <a:latin typeface="Arial" pitchFamily="34" charset="0"/>
-                <a:ea typeface="Arial" pitchFamily="34" charset="-122"/>
-                <a:cs typeface="Arial" pitchFamily="34" charset="-120"/>
-              </a:rPr>
-              <a:t>A</a:t>
+              <a:t>All done</a:t>
+            </a:r>
+            <a:endParaRPr lang="en-US" sz="3400" dirty="0"/>
+          </a:p>
+        </p:txBody>
+      </p:sp>
+      <p:sp>
+        <p:nvSpPr>
+          <p:cNvPr id="3" name="Text 1"/>
+          <p:cNvSpPr/>
+          <p:nvPr/>
+        </p:nvSpPr>
+        <p:spPr>
+          <a:xfrm>
+            <a:off x="731520" y="3108960"/>
+            <a:ext cx="10698480" cy="731520"/>
+          </a:xfrm>
+          <a:prstGeom prst="rect">
+            <a:avLst/>
+          </a:prstGeom>
+          <a:noFill/>
+          <a:ln/>
+        </p:spPr>
+        <p:txBody>
+          <a:bodyPr wrap="square" lIns="0" tIns="0" rIns="0" bIns="0" rtlCol="0" anchor="ctr"/>
+          <a:lstStyle/>
+          <a:p>
+            <a:pPr indent="0" marL="0">
+              <a:buNone/>
+            </a:pPr>
+            <a:r>
+              <a:rPr lang="en-US" sz="1800" dirty="0">
+                <a:solidFill>
+                  <a:srgbClr val="D9EEF1"/>
+                </a:solidFill>
+                <a:latin typeface="Arial" pitchFamily="34" charset="0"/>
+                <a:ea typeface="Arial" pitchFamily="34" charset="-122"/>
+                <a:cs typeface="Arial" pitchFamily="34" charset="-120"/>
+              </a:rPr>
+              <a:t>Ask your teacher how to submit your answers today (for example, on a paper answer slip).</a:t>
             </a:r>
             <a:endParaRPr lang="en-US" sz="1800" dirty="0"/>
-          </a:p>
-        </p:txBody>
-      </p:sp>
-      <p:sp>
-        <p:nvSpPr>
-          <p:cNvPr id="8" name="Text 6"/>
-          <p:cNvSpPr/>
-          <p:nvPr/>
-        </p:nvSpPr>
-        <p:spPr>
-          <a:xfrm>
-            <a:off x="1554480" y="2331720"/>
-            <a:ext cx="9692640" cy="777240"/>
-          </a:xfrm>
-          <a:prstGeom prst="rect">
-            <a:avLst/>
-          </a:prstGeom>
-          <a:noFill/>
-          <a:ln/>
-        </p:spPr>
-        <p:txBody>
-          <a:bodyPr wrap="square" lIns="0" tIns="0" rIns="0" bIns="0" rtlCol="0" anchor="ctr"/>
-          <a:lstStyle/>
-          <a:p>
-            <a:pPr indent="0" marL="0">
-              <a:buNone/>
-            </a:pPr>
-            <a:r>
-              <a:rPr lang="en-US" sz="1500" dirty="0">
-                <a:solidFill>
-                  <a:srgbClr val="FFFFFF"/>
-                </a:solidFill>
-                <a:latin typeface="Arial" pitchFamily="34" charset="0"/>
-                <a:ea typeface="Arial" pitchFamily="34" charset="-122"/>
-                <a:cs typeface="Arial" pitchFamily="34" charset="-120"/>
-              </a:rPr>
-              <a:t>The solution is an acid</a:t>
-            </a:r>
-            <a:endParaRPr lang="en-US" sz="1500" dirty="0"/>
-          </a:p>
-        </p:txBody>
-      </p:sp>
-      <p:sp>
-        <p:nvSpPr>
-          <p:cNvPr id="9" name="Shape 7"/>
-          <p:cNvSpPr/>
-          <p:nvPr/>
-        </p:nvSpPr>
-        <p:spPr>
-          <a:xfrm>
-            <a:off x="731520" y="3246120"/>
-            <a:ext cx="10698480" cy="777240"/>
-          </a:xfrm>
-          <a:prstGeom prst="roundRect">
-            <a:avLst>
-              <a:gd name="adj" fmla="val 9412"/>
-            </a:avLst>
-          </a:prstGeom>
-          <a:solidFill>
-            <a:srgbClr val="7C5CAA"/>
-          </a:solidFill>
-          <a:ln/>
-        </p:spPr>
-      </p:sp>
-      <p:sp>
-        <p:nvSpPr>
-          <p:cNvPr id="10" name="Text 8"/>
-          <p:cNvSpPr/>
-          <p:nvPr/>
-        </p:nvSpPr>
-        <p:spPr>
-          <a:xfrm>
-            <a:off x="914400" y="3246120"/>
-            <a:ext cx="548640" cy="777240"/>
-          </a:xfrm>
-          <a:prstGeom prst="rect">
-            <a:avLst/>
-          </a:prstGeom>
-          <a:noFill/>
-          <a:ln/>
-        </p:spPr>
-        <p:txBody>
-          <a:bodyPr wrap="square" lIns="0" tIns="0" rIns="0" bIns="0" rtlCol="0" anchor="ctr"/>
-          <a:lstStyle/>
-          <a:p>
-            <a:pPr indent="0" marL="0">
-              <a:buNone/>
-            </a:pPr>
-            <a:r>
-              <a:rPr lang="en-US" sz="1800" b="1" dirty="0">
-                <a:solidFill>
-                  <a:srgbClr val="FFFFFF"/>
-                </a:solidFill>
-                <a:latin typeface="Arial" pitchFamily="34" charset="0"/>
-                <a:ea typeface="Arial" pitchFamily="34" charset="-122"/>
-                <a:cs typeface="Arial" pitchFamily="34" charset="-120"/>
-              </a:rPr>
-              <a:t>B</a:t>
-            </a:r>
-            <a:endParaRPr lang="en-US" sz="1800" dirty="0"/>
-          </a:p>
-        </p:txBody>
-      </p:sp>
-      <p:sp>
-        <p:nvSpPr>
-          <p:cNvPr id="11" name="Text 9"/>
-          <p:cNvSpPr/>
-          <p:nvPr/>
-        </p:nvSpPr>
-        <p:spPr>
-          <a:xfrm>
-            <a:off x="1554480" y="3246120"/>
-            <a:ext cx="9692640" cy="777240"/>
-          </a:xfrm>
-          <a:prstGeom prst="rect">
-            <a:avLst/>
-          </a:prstGeom>
-          <a:noFill/>
-          <a:ln/>
-        </p:spPr>
-        <p:txBody>
-          <a:bodyPr wrap="square" lIns="0" tIns="0" rIns="0" bIns="0" rtlCol="0" anchor="ctr"/>
-          <a:lstStyle/>
-          <a:p>
-            <a:pPr indent="0" marL="0">
-              <a:buNone/>
-            </a:pPr>
-            <a:r>
-              <a:rPr lang="en-US" sz="1500" dirty="0">
-                <a:solidFill>
-                  <a:srgbClr val="FFFFFF"/>
-                </a:solidFill>
-                <a:latin typeface="Arial" pitchFamily="34" charset="0"/>
-                <a:ea typeface="Arial" pitchFamily="34" charset="-122"/>
-                <a:cs typeface="Arial" pitchFamily="34" charset="-120"/>
-              </a:rPr>
-              <a:t>The solution is neutral</a:t>
-            </a:r>
-            <a:endParaRPr lang="en-US" sz="1500" dirty="0"/>
-          </a:p>
-        </p:txBody>
-      </p:sp>
-      <p:sp>
-        <p:nvSpPr>
-          <p:cNvPr id="12" name="Shape 10"/>
-          <p:cNvSpPr/>
-          <p:nvPr/>
-        </p:nvSpPr>
-        <p:spPr>
-          <a:xfrm>
-            <a:off x="731520" y="4160520"/>
-            <a:ext cx="10698480" cy="777240"/>
-          </a:xfrm>
-          <a:prstGeom prst="roundRect">
-            <a:avLst>
-              <a:gd name="adj" fmla="val 9412"/>
-            </a:avLst>
-          </a:prstGeom>
-          <a:solidFill>
-            <a:srgbClr val="7C5CAA"/>
-          </a:solidFill>
-          <a:ln/>
-        </p:spPr>
-      </p:sp>
-      <p:sp>
-        <p:nvSpPr>
-          <p:cNvPr id="13" name="Text 11"/>
-          <p:cNvSpPr/>
-          <p:nvPr/>
-        </p:nvSpPr>
-        <p:spPr>
-          <a:xfrm>
-            <a:off x="914400" y="4160520"/>
-            <a:ext cx="548640" cy="777240"/>
-          </a:xfrm>
-          <a:prstGeom prst="rect">
-            <a:avLst/>
-          </a:prstGeom>
-          <a:noFill/>
-          <a:ln/>
-        </p:spPr>
-        <p:txBody>
-          <a:bodyPr wrap="square" lIns="0" tIns="0" rIns="0" bIns="0" rtlCol="0" anchor="ctr"/>
-          <a:lstStyle/>
-          <a:p>
-            <a:pPr indent="0" marL="0">
-              <a:buNone/>
-            </a:pPr>
-            <a:r>
-              <a:rPr lang="en-US" sz="1800" b="1" dirty="0">
-                <a:solidFill>
-                  <a:srgbClr val="FFFFFF"/>
-                </a:solidFill>
-                <a:latin typeface="Arial" pitchFamily="34" charset="0"/>
-                <a:ea typeface="Arial" pitchFamily="34" charset="-122"/>
-                <a:cs typeface="Arial" pitchFamily="34" charset="-120"/>
-              </a:rPr>
-              <a:t>C</a:t>
-            </a:r>
-            <a:endParaRPr lang="en-US" sz="1800" dirty="0"/>
-          </a:p>
-        </p:txBody>
-      </p:sp>
-      <p:sp>
-        <p:nvSpPr>
-          <p:cNvPr id="14" name="Text 12"/>
-          <p:cNvSpPr/>
-          <p:nvPr/>
-        </p:nvSpPr>
-        <p:spPr>
-          <a:xfrm>
-            <a:off x="1554480" y="4160520"/>
-            <a:ext cx="9692640" cy="777240"/>
-          </a:xfrm>
-          <a:prstGeom prst="rect">
-            <a:avLst/>
-          </a:prstGeom>
-          <a:noFill/>
-          <a:ln/>
-        </p:spPr>
-        <p:txBody>
-          <a:bodyPr wrap="square" lIns="0" tIns="0" rIns="0" bIns="0" rtlCol="0" anchor="ctr"/>
-          <a:lstStyle/>
-          <a:p>
-            <a:pPr indent="0" marL="0">
-              <a:buNone/>
-            </a:pPr>
-            <a:r>
-              <a:rPr lang="en-US" sz="1500" dirty="0">
-                <a:solidFill>
-                  <a:srgbClr val="FFFFFF"/>
-                </a:solidFill>
-                <a:latin typeface="Arial" pitchFamily="34" charset="0"/>
-                <a:ea typeface="Arial" pitchFamily="34" charset="-122"/>
-                <a:cs typeface="Arial" pitchFamily="34" charset="-120"/>
-              </a:rPr>
-              <a:t>The solution is not a base, but it could be an acid or neutral, so another indicator is needed</a:t>
-            </a:r>
-            <a:endParaRPr lang="en-US" sz="1500" dirty="0"/>
-          </a:p>
-        </p:txBody>
-      </p:sp>
-      <p:sp>
-        <p:nvSpPr>
-          <p:cNvPr id="15" name="Shape 13"/>
-          <p:cNvSpPr/>
-          <p:nvPr/>
-        </p:nvSpPr>
-        <p:spPr>
-          <a:xfrm>
-            <a:off x="731520" y="5074920"/>
-            <a:ext cx="10698480" cy="777240"/>
-          </a:xfrm>
-          <a:prstGeom prst="roundRect">
-            <a:avLst>
-              <a:gd name="adj" fmla="val 9412"/>
-            </a:avLst>
-          </a:prstGeom>
-          <a:solidFill>
-            <a:srgbClr val="7C5CAA"/>
-          </a:solidFill>
-          <a:ln/>
-        </p:spPr>
-      </p:sp>
-      <p:sp>
-        <p:nvSpPr>
-          <p:cNvPr id="16" name="Text 14"/>
-          <p:cNvSpPr/>
-          <p:nvPr/>
-        </p:nvSpPr>
-        <p:spPr>
-          <a:xfrm>
-            <a:off x="914400" y="5074920"/>
-            <a:ext cx="548640" cy="777240"/>
-          </a:xfrm>
-          <a:prstGeom prst="rect">
-            <a:avLst/>
-          </a:prstGeom>
-          <a:noFill/>
-          <a:ln/>
-        </p:spPr>
-        <p:txBody>
-          <a:bodyPr wrap="square" lIns="0" tIns="0" rIns="0" bIns="0" rtlCol="0" anchor="ctr"/>
-          <a:lstStyle/>
-          <a:p>
-            <a:pPr indent="0" marL="0">
-              <a:buNone/>
-            </a:pPr>
-            <a:r>
-              <a:rPr lang="en-US" sz="1800" b="1" dirty="0">
-                <a:solidFill>
-                  <a:srgbClr val="FFFFFF"/>
-                </a:solidFill>
-                <a:latin typeface="Arial" pitchFamily="34" charset="0"/>
-                <a:ea typeface="Arial" pitchFamily="34" charset="-122"/>
-                <a:cs typeface="Arial" pitchFamily="34" charset="-120"/>
-              </a:rPr>
-              <a:t>D</a:t>
-            </a:r>
-            <a:endParaRPr lang="en-US" sz="1800" dirty="0"/>
-          </a:p>
-        </p:txBody>
-      </p:sp>
-      <p:sp>
-        <p:nvSpPr>
-          <p:cNvPr id="17" name="Text 15"/>
-          <p:cNvSpPr/>
-          <p:nvPr/>
-        </p:nvSpPr>
-        <p:spPr>
-          <a:xfrm>
-            <a:off x="1554480" y="5074920"/>
-            <a:ext cx="9692640" cy="777240"/>
-          </a:xfrm>
-          <a:prstGeom prst="rect">
-            <a:avLst/>
-          </a:prstGeom>
-          <a:noFill/>
-          <a:ln/>
-        </p:spPr>
-        <p:txBody>
-          <a:bodyPr wrap="square" lIns="0" tIns="0" rIns="0" bIns="0" rtlCol="0" anchor="ctr"/>
-          <a:lstStyle/>
-          <a:p>
-            <a:pPr indent="0" marL="0">
-              <a:buNone/>
-            </a:pPr>
-            <a:r>
-              <a:rPr lang="en-US" sz="1500" dirty="0">
-                <a:solidFill>
-                  <a:srgbClr val="FFFFFF"/>
-                </a:solidFill>
-                <a:latin typeface="Arial" pitchFamily="34" charset="0"/>
-                <a:ea typeface="Arial" pitchFamily="34" charset="-122"/>
-                <a:cs typeface="Arial" pitchFamily="34" charset="-120"/>
-              </a:rPr>
-              <a:t>The solution is a base</a:t>
-            </a:r>
-            <a:endParaRPr lang="en-US" sz="1500" dirty="0"/>
-          </a:p>
-        </p:txBody>
-      </p:sp>
-      <p:sp>
-        <p:nvSpPr>
-          <p:cNvPr id="18" name="Text 16"/>
-          <p:cNvSpPr/>
-          <p:nvPr/>
-        </p:nvSpPr>
-        <p:spPr>
-          <a:xfrm>
-            <a:off x="11521440" y="6446520"/>
-            <a:ext cx="457200" cy="274320"/>
-          </a:xfrm>
-          <a:prstGeom prst="rect">
-            <a:avLst/>
-          </a:prstGeom>
-          <a:noFill/>
-          <a:ln/>
-        </p:spPr>
-        <p:txBody>
-          <a:bodyPr wrap="square" lIns="0" tIns="0" rIns="0" bIns="0" rtlCol="0" anchor="ctr"/>
-          <a:lstStyle/>
-          <a:p>
-            <a:pPr algn="r" indent="0" marL="0">
-              <a:buNone/>
-            </a:pPr>
-            <a:r>
-              <a:rPr lang="en-US" sz="1000" dirty="0">
-                <a:solidFill>
-                  <a:srgbClr val="C9B8E0"/>
-                </a:solidFill>
-                <a:latin typeface="Arial" pitchFamily="34" charset="0"/>
-                <a:ea typeface="Arial" pitchFamily="34" charset="-122"/>
-                <a:cs typeface="Arial" pitchFamily="34" charset="-120"/>
-              </a:rPr>
-              <a:t>9</a:t>
-            </a:r>
-            <a:endParaRPr lang="en-US" sz="1000" dirty="0"/>
           </a:p>
         </p:txBody>
       </p:sp>

--- a/data/outputs/v2/Chemistry/SS3.1_Acids_and_Bases/quiz/Chemistry_G10_SS3.1_Acids_and_Bases_L4_QuickCheck.pptx
+++ b/data/outputs/v2/Chemistry/SS3.1_Acids_and_Bases/quiz/Chemistry_G10_SS3.1_Acids_and_Bases_L4_QuickCheck.pptx
@@ -14,9 +14,10 @@
     <p:sldId id="262" r:id="rId8"/>
     <p:sldId id="263" r:id="rId9"/>
     <p:sldId id="264" r:id="rId10"/>
+    <p:sldId id="265" r:id="rId11"/>
   </p:sldIdLst>
   <p:notesMasterIdLst>
-    <p:notesMasterId r:id="rId11"/>
+    <p:notesMasterId r:id="rId12"/>
   </p:notesMasterIdLst>
   <p:sldSz cx="12192000" cy="6858000"/>
   <p:notesSz cx="6858000" cy="12192000"/>
@@ -534,6 +535,94 @@
             <a:fld id="{F7021451-1387-4CA6-816F-3879F97B5CBC}" type="slidenum">
               <a:rPr lang="en-US"/>
               <a:t>1</a:t>
+            </a:fld>
+            <a:endParaRPr lang="en-US"/>
+          </a:p>
+        </p:txBody>
+      </p:sp>
+    </p:spTree>
+    <p:extLst>
+      <p:ext uri="{BB962C8B-B14F-4D97-AF65-F5344CB8AC3E}">
+        <p14:creationId xmlns:p14="http://schemas.microsoft.com/office/powerpoint/2010/main" val="1024086991"/>
+      </p:ext>
+    </p:extLst>
+  </p:cSld>
+  <p:clrMapOvr>
+    <a:masterClrMapping/>
+  </p:clrMapOvr>
+</p:notes>
+</file>
+
+<file path=ppt/notesSlides/notesSlide10.xml><?xml version="1.0" encoding="utf-8"?>
+<p:notes xmlns:a="http://schemas.openxmlformats.org/drawingml/2006/main" xmlns:r="http://schemas.openxmlformats.org/officeDocument/2006/relationships" xmlns:p="http://schemas.openxmlformats.org/presentationml/2006/main">
+  <p:cSld>
+    <p:spTree>
+      <p:nvGrpSpPr>
+        <p:cNvPr id="1" name=""/>
+        <p:cNvGrpSpPr/>
+        <p:nvPr/>
+      </p:nvGrpSpPr>
+      <p:grpSpPr>
+        <a:xfrm>
+          <a:off x="0" y="0"/>
+          <a:ext cx="0" cy="0"/>
+          <a:chOff x="0" y="0"/>
+          <a:chExt cx="0" cy="0"/>
+        </a:xfrm>
+      </p:grpSpPr>
+      <p:sp>
+        <p:nvSpPr>
+          <p:cNvPr id="2" name="Slide Image Placeholder 1"/>
+          <p:cNvSpPr>
+            <a:spLocks noGrp="1" noRot="1" noChangeAspect="1"/>
+          </p:cNvSpPr>
+          <p:nvPr>
+            <p:ph type="sldImg"/>
+          </p:nvPr>
+        </p:nvSpPr>
+        <p:spPr/>
+      </p:sp>
+      <p:sp>
+        <p:nvSpPr>
+          <p:cNvPr id="3" name="Notes Placeholder 2"/>
+          <p:cNvSpPr>
+            <a:spLocks noGrp="1"/>
+          </p:cNvSpPr>
+          <p:nvPr>
+            <p:ph type="body" idx="1"/>
+          </p:nvPr>
+        </p:nvSpPr>
+        <p:spPr/>
+        <p:txBody>
+          <a:bodyPr/>
+          <a:lstStyle/>
+          <a:p>
+            <a:r>
+              <a:rPr lang="en-US" dirty="0"/>
+              <a:t/>
+            </a:r>
+            <a:endParaRPr lang="en-US" dirty="0"/>
+          </a:p>
+        </p:txBody>
+      </p:sp>
+      <p:sp>
+        <p:nvSpPr>
+          <p:cNvPr id="4" name="Slide Number Placeholder 3"/>
+          <p:cNvSpPr>
+            <a:spLocks noGrp="1"/>
+          </p:cNvSpPr>
+          <p:nvPr>
+            <p:ph type="sldNum" sz="quarter" idx="10"/>
+          </p:nvPr>
+        </p:nvSpPr>
+        <p:spPr/>
+        <p:txBody>
+          <a:bodyPr/>
+          <a:lstStyle/>
+          <a:p>
+            <a:fld id="{F7021451-1387-4CA6-816F-3879F97B5CBC}" type="slidenum">
+              <a:rPr lang="en-US"/>
+              <a:t>10</a:t>
             </a:fld>
             <a:endParaRPr lang="en-US"/>
           </a:p>
@@ -1698,7 +1787,7 @@
                 <a:ea typeface="Arial" pitchFamily="34" charset="-122"/>
                 <a:cs typeface="Arial" pitchFamily="34" charset="-120"/>
               </a:rPr>
-              <a:t>Lesson 4: Differences Between Acids and Bases Using Commercial Indicators</a:t>
+              <a:t>Lesson 4: Why is Lemon Juice Sour? Acids Release H⁺ Ions in Water (Arrhenius Definition)</a:t>
             </a:r>
             <a:endParaRPr lang="en-US" sz="2000" dirty="0"/>
           </a:p>
@@ -1737,7 +1826,7 @@
                 <a:ea typeface="Arial" pitchFamily="34" charset="-122"/>
                 <a:cs typeface="Arial" pitchFamily="34" charset="-120"/>
               </a:rPr>
-              <a:t>7 multiple-choice questions  •  choose A, B, C or D</a:t>
+              <a:t>8 multiple-choice questions  •  choose A, B, C or D</a:t>
             </a:r>
             <a:endParaRPr lang="en-US" sz="1600" dirty="0"/>
           </a:p>
@@ -1853,6 +1942,116 @@
               <a:t> (https://creativecommons.org/licenses/by-nc/4.0/).</a:t>
             </a:r>
             <a:endParaRPr lang="en-US" sz="900" dirty="0"/>
+          </a:p>
+        </p:txBody>
+      </p:sp>
+    </p:spTree>
+  </p:cSld>
+  <p:clrMapOvr>
+    <a:masterClrMapping/>
+  </p:clrMapOvr>
+</p:sld>
+</file>
+
+<file path=ppt/slides/slide10.xml><?xml version="1.0" encoding="utf-8"?>
+<p:sld xmlns:a="http://schemas.openxmlformats.org/drawingml/2006/main" xmlns:r="http://schemas.openxmlformats.org/officeDocument/2006/relationships" xmlns:p="http://schemas.openxmlformats.org/presentationml/2006/main">
+  <p:cSld name="Slide 10">
+    <p:bg>
+      <p:bgPr>
+        <a:solidFill>
+          <a:srgbClr val="1F3864"/>
+        </a:solidFill>
+      </p:bgPr>
+    </p:bg>
+    <p:spTree>
+      <p:nvGrpSpPr>
+        <p:cNvPr id="1" name=""/>
+        <p:cNvGrpSpPr/>
+        <p:nvPr/>
+      </p:nvGrpSpPr>
+      <p:grpSpPr>
+        <a:xfrm>
+          <a:off x="0" y="0"/>
+          <a:ext cx="0" cy="0"/>
+          <a:chOff x="0" y="0"/>
+          <a:chExt cx="0" cy="0"/>
+        </a:xfrm>
+      </p:grpSpPr>
+      <p:sp>
+        <p:nvSpPr>
+          <p:cNvPr id="2" name="Text 0"/>
+          <p:cNvSpPr/>
+          <p:nvPr/>
+        </p:nvSpPr>
+        <p:spPr>
+          <a:xfrm>
+            <a:off x="731520" y="2194560"/>
+            <a:ext cx="10698480" cy="822960"/>
+          </a:xfrm>
+          <a:prstGeom prst="rect">
+            <a:avLst/>
+          </a:prstGeom>
+          <a:noFill/>
+          <a:ln/>
+        </p:spPr>
+        <p:txBody>
+          <a:bodyPr wrap="square" lIns="0" tIns="0" rIns="0" bIns="0" rtlCol="0" anchor="ctr"/>
+          <a:lstStyle/>
+          <a:p>
+            <a:pPr indent="0" marL="0">
+              <a:buNone/>
+            </a:pPr>
+            <a:r>
+              <a:rPr lang="en-US" sz="3400" b="1" dirty="0">
+                <a:solidFill>
+                  <a:srgbClr val="FFFFFF"/>
+                </a:solidFill>
+                <a:latin typeface="Arial" pitchFamily="34" charset="0"/>
+                <a:ea typeface="Arial" pitchFamily="34" charset="-122"/>
+                <a:cs typeface="Arial" pitchFamily="34" charset="-120"/>
+              </a:rPr>
+              <a:t>All done</a:t>
+            </a:r>
+            <a:endParaRPr lang="en-US" sz="3400" dirty="0"/>
+          </a:p>
+        </p:txBody>
+      </p:sp>
+      <p:sp>
+        <p:nvSpPr>
+          <p:cNvPr id="3" name="Text 1"/>
+          <p:cNvSpPr/>
+          <p:nvPr/>
+        </p:nvSpPr>
+        <p:spPr>
+          <a:xfrm>
+            <a:off x="731520" y="3108960"/>
+            <a:ext cx="10698480" cy="731520"/>
+          </a:xfrm>
+          <a:prstGeom prst="rect">
+            <a:avLst/>
+          </a:prstGeom>
+          <a:noFill/>
+          <a:ln/>
+        </p:spPr>
+        <p:txBody>
+          <a:bodyPr wrap="square" lIns="0" tIns="0" rIns="0" bIns="0" rtlCol="0" anchor="ctr"/>
+          <a:lstStyle/>
+          <a:p>
+            <a:pPr indent="0" marL="0">
+              <a:buNone/>
+            </a:pPr>
+            <a:r>
+              <a:rPr lang="en-US" sz="1800" dirty="0">
+                <a:solidFill>
+                  <a:srgbClr val="D9EEF1"/>
+                </a:solidFill>
+                <a:latin typeface="Arial" pitchFamily="34" charset="0"/>
+                <a:ea typeface="Arial" pitchFamily="34" charset="-122"/>
+                <a:cs typeface="Arial" pitchFamily="34" charset="-120"/>
+              </a:rPr>
+              <a:t>Ask your teacher how to submit your answers today (for example, on a paper answer slip).</a:t>
+            </a:r>
+            <a:endParaRPr lang="en-US" sz="1800" dirty="0"/>
           </a:p>
         </p:txBody>
       </p:sp>
@@ -1921,7 +2120,7 @@
                 <a:ea typeface="Arial" pitchFamily="34" charset="-122"/>
                 <a:cs typeface="Arial" pitchFamily="34" charset="-120"/>
               </a:rPr>
-              <a:t>QUESTION 1 OF 7</a:t>
+              <a:t>QUESTION 1 OF 8</a:t>
             </a:r>
             <a:endParaRPr lang="en-US" sz="1300" dirty="0"/>
           </a:p>
@@ -1982,7 +2181,7 @@
                 <a:ea typeface="Arial" pitchFamily="34" charset="-122"/>
                 <a:cs typeface="Arial" pitchFamily="34" charset="-120"/>
               </a:rPr>
-              <a:t>Use after: Predict phase</a:t>
+              <a:t>Use after: Observe phase</a:t>
             </a:r>
             <a:endParaRPr lang="en-US" sz="1100" dirty="0"/>
           </a:p>
@@ -2021,7 +2220,7 @@
                 <a:ea typeface="Arial" pitchFamily="34" charset="-122"/>
                 <a:cs typeface="Arial" pitchFamily="34" charset="-120"/>
               </a:rPr>
-              <a:t>Two partners disagree about what colour methyl orange will turn in baking soda solution. Before testing, what is the best way to settle the disagreement?</a:t>
+              <a:t>Pure water has pH 7.0 and H⁺ concentration of 1 x 10⁻⁷ mol/L. Which statement about the H⁺ ions in pure water is correct?</a:t>
             </a:r>
             <a:endParaRPr lang="en-US" sz="2000" dirty="0"/>
           </a:p>
@@ -2121,7 +2320,7 @@
                 <a:ea typeface="Arial" pitchFamily="34" charset="-122"/>
                 <a:cs typeface="Arial" pitchFamily="34" charset="-120"/>
               </a:rPr>
-              <a:t>Carry out the test and record the colour actually seen</a:t>
+              <a:t>It has a tiny amount of H⁺, far less than lemon juice</a:t>
             </a:r>
             <a:endParaRPr lang="en-US" sz="1700" dirty="0"/>
           </a:p>
@@ -2221,7 +2420,7 @@
                 <a:ea typeface="Arial" pitchFamily="34" charset="-122"/>
                 <a:cs typeface="Arial" pitchFamily="34" charset="-120"/>
               </a:rPr>
-              <a:t>Ask the teacher to say which prediction is right</a:t>
+              <a:t>It has more H⁺ than vinegar</a:t>
             </a:r>
             <a:endParaRPr lang="en-US" sz="1700" dirty="0"/>
           </a:p>
@@ -2321,7 +2520,7 @@
                 <a:ea typeface="Arial" pitchFamily="34" charset="-122"/>
                 <a:cs typeface="Arial" pitchFamily="34" charset="-120"/>
               </a:rPr>
-              <a:t>Vote and go with the answer most students choose</a:t>
+              <a:t>It has the same amount of H⁺ as lemon juice</a:t>
             </a:r>
             <a:endParaRPr lang="en-US" sz="1700" dirty="0"/>
           </a:p>
@@ -2421,7 +2620,7 @@
                 <a:ea typeface="Arial" pitchFamily="34" charset="-122"/>
                 <a:cs typeface="Arial" pitchFamily="34" charset="-120"/>
               </a:rPr>
-              <a:t>Let the student who is more confident decide</a:t>
+              <a:t>It has no H⁺ ions at all</a:t>
             </a:r>
             <a:endParaRPr lang="en-US" sz="1700" dirty="0"/>
           </a:p>
@@ -2531,7 +2730,7 @@
                 <a:ea typeface="Arial" pitchFamily="34" charset="-122"/>
                 <a:cs typeface="Arial" pitchFamily="34" charset="-120"/>
               </a:rPr>
-              <a:t>QUESTION 2 OF 7</a:t>
+              <a:t>QUESTION 2 OF 8</a:t>
             </a:r>
             <a:endParaRPr lang="en-US" sz="1300" dirty="0"/>
           </a:p>
@@ -2631,7 +2830,7 @@
                 <a:ea typeface="Arial" pitchFamily="34" charset="-122"/>
                 <a:cs typeface="Arial" pitchFamily="34" charset="-120"/>
               </a:rPr>
-              <a:t>In Experiment 1, a student puts 2-3 drops of freshly squeezed lemon juice on a strip of blue litmus paper. What colour does the paper turn?</a:t>
+              <a:t>Lemon juice has pH 2.0 and H⁺ = 1 x 10⁻² mol/L. Vinegar has pH 2.8 and H⁺ about 1.6 x 10⁻³ mol/L. About how many times more H⁺ does lemon juice have than vinegar?</a:t>
             </a:r>
             <a:endParaRPr lang="en-US" sz="2000" dirty="0"/>
           </a:p>
@@ -2731,7 +2930,7 @@
                 <a:ea typeface="Arial" pitchFamily="34" charset="-122"/>
                 <a:cs typeface="Arial" pitchFamily="34" charset="-120"/>
               </a:rPr>
-              <a:t>Red</a:t>
+              <a:t>About 0.8 times</a:t>
             </a:r>
             <a:endParaRPr lang="en-US" sz="1700" dirty="0"/>
           </a:p>
@@ -2831,7 +3030,7 @@
                 <a:ea typeface="Arial" pitchFamily="34" charset="-122"/>
                 <a:cs typeface="Arial" pitchFamily="34" charset="-120"/>
               </a:rPr>
-              <a:t>Blue (no change)</a:t>
+              <a:t>About 10 times</a:t>
             </a:r>
             <a:endParaRPr lang="en-US" sz="1700" dirty="0"/>
           </a:p>
@@ -2931,7 +3130,7 @@
                 <a:ea typeface="Arial" pitchFamily="34" charset="-122"/>
                 <a:cs typeface="Arial" pitchFamily="34" charset="-120"/>
               </a:rPr>
-              <a:t>Pink</a:t>
+              <a:t>About 6 times</a:t>
             </a:r>
             <a:endParaRPr lang="en-US" sz="1700" dirty="0"/>
           </a:p>
@@ -3031,7 +3230,7 @@
                 <a:ea typeface="Arial" pitchFamily="34" charset="-122"/>
                 <a:cs typeface="Arial" pitchFamily="34" charset="-120"/>
               </a:rPr>
-              <a:t>Colourless</a:t>
+              <a:t>About 60 times</a:t>
             </a:r>
             <a:endParaRPr lang="en-US" sz="1700" dirty="0"/>
           </a:p>
@@ -3141,7 +3340,7 @@
                 <a:ea typeface="Arial" pitchFamily="34" charset="-122"/>
                 <a:cs typeface="Arial" pitchFamily="34" charset="-120"/>
               </a:rPr>
-              <a:t>QUESTION 3 OF 7</a:t>
+              <a:t>QUESTION 3 OF 8</a:t>
             </a:r>
             <a:endParaRPr lang="en-US" sz="1300" dirty="0"/>
           </a:p>
@@ -3233,17 +3432,17 @@
               <a:buNone/>
             </a:pPr>
             <a:r>
-              <a:rPr lang="en-US" sz="2000" b="1" dirty="0">
-                <a:solidFill>
-                  <a:srgbClr val="FFFFFF"/>
-                </a:solidFill>
-                <a:latin typeface="Arial" pitchFamily="34" charset="0"/>
-                <a:ea typeface="Arial" pitchFamily="34" charset="-122"/>
-                <a:cs typeface="Arial" pitchFamily="34" charset="-120"/>
-              </a:rPr>
-              <a:t>A group predicted that cow's milk would be strongly basic. Their litmus and indicator results do not match this prediction. What should the recorders do?</a:t>
-            </a:r>
-            <a:endParaRPr lang="en-US" sz="2000" dirty="0"/>
+              <a:rPr lang="en-US" sz="2300" b="1" dirty="0">
+                <a:solidFill>
+                  <a:srgbClr val="FFFFFF"/>
+                </a:solidFill>
+                <a:latin typeface="Arial" pitchFamily="34" charset="0"/>
+                <a:ea typeface="Arial" pitchFamily="34" charset="-122"/>
+                <a:cs typeface="Arial" pitchFamily="34" charset="-120"/>
+              </a:rPr>
+              <a:t>In a particle simulation, acid molecules from lemon juice dissolve in water. What do learners see happen?</a:t>
+            </a:r>
+            <a:endParaRPr lang="en-US" sz="2300" dirty="0"/>
           </a:p>
         </p:txBody>
       </p:sp>
@@ -3341,7 +3540,7 @@
                 <a:ea typeface="Arial" pitchFamily="34" charset="-122"/>
                 <a:cs typeface="Arial" pitchFamily="34" charset="-120"/>
               </a:rPr>
-              <a:t>Write down the colours exactly as seen, even if they differ from the prediction</a:t>
+              <a:t>The acid molecules stay whole and release nothing</a:t>
             </a:r>
             <a:endParaRPr lang="en-US" sz="1700" dirty="0"/>
           </a:p>
@@ -3441,7 +3640,7 @@
                 <a:ea typeface="Arial" pitchFamily="34" charset="-122"/>
                 <a:cs typeface="Arial" pitchFamily="34" charset="-120"/>
               </a:rPr>
-              <a:t>Leave the milk row blank because the result was unexpected</a:t>
+              <a:t>The acid molecules turn into sugar particles</a:t>
             </a:r>
             <a:endParaRPr lang="en-US" sz="1700" dirty="0"/>
           </a:p>
@@ -3541,7 +3740,7 @@
                 <a:ea typeface="Arial" pitchFamily="34" charset="-122"/>
                 <a:cs typeface="Arial" pitchFamily="34" charset="-120"/>
               </a:rPr>
-              <a:t>Copy the results from another group's table</a:t>
+              <a:t>The acid molecules remove all the water particles</a:t>
             </a:r>
             <a:endParaRPr lang="en-US" sz="1700" dirty="0"/>
           </a:p>
@@ -3641,7 +3840,7 @@
                 <a:ea typeface="Arial" pitchFamily="34" charset="-122"/>
                 <a:cs typeface="Arial" pitchFamily="34" charset="-120"/>
               </a:rPr>
-              <a:t>Change the results in the table to match the prediction</a:t>
+              <a:t>The acid molecules release H⁺ (aq) ions into the water</a:t>
             </a:r>
             <a:endParaRPr lang="en-US" sz="1700" dirty="0"/>
           </a:p>
@@ -3751,7 +3950,7 @@
                 <a:ea typeface="Arial" pitchFamily="34" charset="-122"/>
                 <a:cs typeface="Arial" pitchFamily="34" charset="-120"/>
               </a:rPr>
-              <a:t>QUESTION 4 OF 7</a:t>
+              <a:t>QUESTION 4 OF 8</a:t>
             </a:r>
             <a:endParaRPr lang="en-US" sz="1300" dirty="0"/>
           </a:p>
@@ -3851,7 +4050,7 @@
                 <a:ea typeface="Arial" pitchFamily="34" charset="-122"/>
                 <a:cs typeface="Arial" pitchFamily="34" charset="-120"/>
               </a:rPr>
-              <a:t>Liquid soap solution turns red litmus paper blue and turns phenolphthalein pink. How should it be classified, and why?</a:t>
+              <a:t>Which statement is the Arrhenius definition of an acid?</a:t>
             </a:r>
             <a:endParaRPr lang="en-US" sz="2300" dirty="0"/>
           </a:p>
@@ -3951,7 +4150,7 @@
                 <a:ea typeface="Arial" pitchFamily="34" charset="-122"/>
                 <a:cs typeface="Arial" pitchFamily="34" charset="-120"/>
               </a:rPr>
-              <a:t>Acid, because it changes the colour of litmus paper</a:t>
+              <a:t>A substance that is harmful if swallowed</a:t>
             </a:r>
             <a:endParaRPr lang="en-US" sz="1700" dirty="0"/>
           </a:p>
@@ -4051,7 +4250,7 @@
                 <a:ea typeface="Arial" pitchFamily="34" charset="-122"/>
                 <a:cs typeface="Arial" pitchFamily="34" charset="-120"/>
               </a:rPr>
-              <a:t>Base, because red litmus turns blue and phenolphthalein turns pink</a:t>
+              <a:t>A substance that contains no water</a:t>
             </a:r>
             <a:endParaRPr lang="en-US" sz="1700" dirty="0"/>
           </a:p>
@@ -4151,7 +4350,7 @@
                 <a:ea typeface="Arial" pitchFamily="34" charset="-122"/>
                 <a:cs typeface="Arial" pitchFamily="34" charset="-120"/>
               </a:rPr>
-              <a:t>Neutral, because it does not make methyl orange red</a:t>
+              <a:t>A substance that produces H⁺ (aq) ions when dissolved in water</a:t>
             </a:r>
             <a:endParaRPr lang="en-US" sz="1700" dirty="0"/>
           </a:p>
@@ -4251,7 +4450,7 @@
                 <a:ea typeface="Arial" pitchFamily="34" charset="-122"/>
                 <a:cs typeface="Arial" pitchFamily="34" charset="-120"/>
               </a:rPr>
-              <a:t>Acid, because phenolphthalein changes colour</a:t>
+              <a:t>A substance that tastes sour in the laboratory</a:t>
             </a:r>
             <a:endParaRPr lang="en-US" sz="1700" dirty="0"/>
           </a:p>
@@ -4361,7 +4560,7 @@
                 <a:ea typeface="Arial" pitchFamily="34" charset="-122"/>
                 <a:cs typeface="Arial" pitchFamily="34" charset="-120"/>
               </a:rPr>
-              <a:t>QUESTION 5 OF 7</a:t>
+              <a:t>QUESTION 5 OF 8</a:t>
             </a:r>
             <a:endParaRPr lang="en-US" sz="1300" dirty="0"/>
           </a:p>
@@ -4453,17 +4652,17 @@
               <a:buNone/>
             </a:pPr>
             <a:r>
-              <a:rPr lang="en-US" sz="2000" b="1" dirty="0">
-                <a:solidFill>
-                  <a:srgbClr val="FFFFFF"/>
-                </a:solidFill>
-                <a:latin typeface="Arial" pitchFamily="34" charset="0"/>
-                <a:ea typeface="Arial" pitchFamily="34" charset="-122"/>
-                <a:cs typeface="Arial" pitchFamily="34" charset="-120"/>
-              </a:rPr>
-              <a:t>A student tests tap water. Litmus paper shows no colour change, phenolphthalein stays colourless and methyl orange is orange-yellow. What is the best conclusion?</a:t>
-            </a:r>
-            <a:endParaRPr lang="en-US" sz="2000" dirty="0"/>
+              <a:rPr lang="en-US" sz="2300" b="1" dirty="0">
+                <a:solidFill>
+                  <a:srgbClr val="FFFFFF"/>
+                </a:solidFill>
+                <a:latin typeface="Arial" pitchFamily="34" charset="0"/>
+                <a:ea typeface="Arial" pitchFamily="34" charset="-122"/>
+                <a:cs typeface="Arial" pitchFamily="34" charset="-120"/>
+              </a:rPr>
+              <a:t>Lemon juice (pH 2.0) and vinegar (pH 2.8) are both acids. Why does lemon juice have the lower pH?</a:t>
+            </a:r>
+            <a:endParaRPr lang="en-US" sz="2300" dirty="0"/>
           </a:p>
         </p:txBody>
       </p:sp>
@@ -4561,7 +4760,7 @@
                 <a:ea typeface="Arial" pitchFamily="34" charset="-122"/>
                 <a:cs typeface="Arial" pitchFamily="34" charset="-120"/>
               </a:rPr>
-              <a:t>It is neutral, because none of the indicators show an acid or base colour</a:t>
+              <a:t>It contains no water, but vinegar does</a:t>
             </a:r>
             <a:endParaRPr lang="en-US" sz="1700" dirty="0"/>
           </a:p>
@@ -4661,7 +4860,7 @@
                 <a:ea typeface="Arial" pitchFamily="34" charset="-122"/>
                 <a:cs typeface="Arial" pitchFamily="34" charset="-120"/>
               </a:rPr>
-              <a:t>It cannot be classified because no indicator turned red</a:t>
+              <a:t>It has fewer H⁺ ions than vinegar</a:t>
             </a:r>
             <a:endParaRPr lang="en-US" sz="1700" dirty="0"/>
           </a:p>
@@ -4761,7 +4960,7 @@
                 <a:ea typeface="Arial" pitchFamily="34" charset="-122"/>
                 <a:cs typeface="Arial" pitchFamily="34" charset="-120"/>
               </a:rPr>
-              <a:t>It is a base, because methyl orange is yellowish</a:t>
+              <a:t>It has a higher concentration of H⁺ ions than vinegar</a:t>
             </a:r>
             <a:endParaRPr lang="en-US" sz="1700" dirty="0"/>
           </a:p>
@@ -4861,7 +5060,7 @@
                 <a:ea typeface="Arial" pitchFamily="34" charset="-122"/>
                 <a:cs typeface="Arial" pitchFamily="34" charset="-120"/>
               </a:rPr>
-              <a:t>It is an acid, because phenolphthalein is colourless</a:t>
+              <a:t>It contains more sugar than vinegar</a:t>
             </a:r>
             <a:endParaRPr lang="en-US" sz="1700" dirty="0"/>
           </a:p>
@@ -4971,7 +5170,7 @@
                 <a:ea typeface="Arial" pitchFamily="34" charset="-122"/>
                 <a:cs typeface="Arial" pitchFamily="34" charset="-120"/>
               </a:rPr>
-              <a:t>QUESTION 6 OF 7</a:t>
+              <a:t>QUESTION 6 OF 8</a:t>
             </a:r>
             <a:endParaRPr lang="en-US" sz="1300" dirty="0"/>
           </a:p>
@@ -5063,17 +5262,17 @@
               <a:buNone/>
             </a:pPr>
             <a:r>
-              <a:rPr lang="en-US" sz="2000" b="1" dirty="0">
-                <a:solidFill>
-                  <a:srgbClr val="FFFFFF"/>
-                </a:solidFill>
-                <a:latin typeface="Arial" pitchFamily="34" charset="0"/>
-                <a:ea typeface="Arial" pitchFamily="34" charset="-122"/>
-                <a:cs typeface="Arial" pitchFamily="34" charset="-120"/>
-              </a:rPr>
-              <a:t>After Experiment 1, students can tell whether a liquid is an acid, a base or neutral using indicators. Which question is still NOT answered by this experiment?</a:t>
-            </a:r>
-            <a:endParaRPr lang="en-US" sz="2000" dirty="0"/>
+              <a:rPr lang="en-US" sz="2300" b="1" dirty="0">
+                <a:solidFill>
+                  <a:srgbClr val="FFFFFF"/>
+                </a:solidFill>
+                <a:latin typeface="Arial" pitchFamily="34" charset="0"/>
+                <a:ea typeface="Arial" pitchFamily="34" charset="-122"/>
+                <a:cs typeface="Arial" pitchFamily="34" charset="-120"/>
+              </a:rPr>
+              <a:t>Stomach acid is hydrochloric acid. Which particle does it release when it dissolves in water, making it an acid?</a:t>
+            </a:r>
+            <a:endParaRPr lang="en-US" sz="2300" dirty="0"/>
           </a:p>
         </p:txBody>
       </p:sp>
@@ -5171,7 +5370,7 @@
                 <a:ea typeface="Arial" pitchFamily="34" charset="-122"/>
                 <a:cs typeface="Arial" pitchFamily="34" charset="-120"/>
               </a:rPr>
-              <a:t>How do acids react, for example do they corrode or react with other substances?</a:t>
+              <a:t>No particles, because it is a liquid</a:t>
             </a:r>
             <a:endParaRPr lang="en-US" sz="1700" dirty="0"/>
           </a:p>
@@ -5271,7 +5470,7 @@
                 <a:ea typeface="Arial" pitchFamily="34" charset="-122"/>
                 <a:cs typeface="Arial" pitchFamily="34" charset="-120"/>
               </a:rPr>
-              <a:t>Is baking soda solution a base?</a:t>
+              <a:t>Only water particles</a:t>
             </a:r>
             <a:endParaRPr lang="en-US" sz="1700" dirty="0"/>
           </a:p>
@@ -5371,7 +5570,7 @@
                 <a:ea typeface="Arial" pitchFamily="34" charset="-122"/>
                 <a:cs typeface="Arial" pitchFamily="34" charset="-120"/>
               </a:rPr>
-              <a:t>What colour does phenolphthalein turn in a base?</a:t>
+              <a:t>H⁺ (aq) ions</a:t>
             </a:r>
             <a:endParaRPr lang="en-US" sz="1700" dirty="0"/>
           </a:p>
@@ -5471,7 +5670,7 @@
                 <a:ea typeface="Arial" pitchFamily="34" charset="-122"/>
                 <a:cs typeface="Arial" pitchFamily="34" charset="-120"/>
               </a:rPr>
-              <a:t>Is vinegar (siki) an acid?</a:t>
+              <a:t>Sugar particles</a:t>
             </a:r>
             <a:endParaRPr lang="en-US" sz="1700" dirty="0"/>
           </a:p>
@@ -5581,7 +5780,7 @@
                 <a:ea typeface="Arial" pitchFamily="34" charset="-122"/>
                 <a:cs typeface="Arial" pitchFamily="34" charset="-120"/>
               </a:rPr>
-              <a:t>QUESTION 7 OF 7</a:t>
+              <a:t>QUESTION 7 OF 8</a:t>
             </a:r>
             <a:endParaRPr lang="en-US" sz="1300" dirty="0"/>
           </a:p>
@@ -5681,7 +5880,7 @@
                 <a:ea typeface="Arial" pitchFamily="34" charset="-122"/>
                 <a:cs typeface="Arial" pitchFamily="34" charset="-120"/>
               </a:rPr>
-              <a:t>A student revises a model by labelling the liquids tested in Experiment 1 using the evidence. Which set of labels is correct?</a:t>
+              <a:t>In a Model drawing, lemon juice (H⁺ = 1 x 10⁻² mol/L) is shown with 6 H⁺ dots. Which drawing for vinegar (about 1.6 x 10⁻³ mol/L) and water (1 x 10⁻⁷ mol/L) is best?</a:t>
             </a:r>
             <a:endParaRPr lang="en-US" sz="2000" dirty="0"/>
           </a:p>
@@ -5781,7 +5980,7 @@
                 <a:ea typeface="Arial" pitchFamily="34" charset="-122"/>
                 <a:cs typeface="Arial" pitchFamily="34" charset="-120"/>
               </a:rPr>
-              <a:t>Lemon juice: base; baking soda solution: acid; tap water: neutral</a:t>
+              <a:t>Vinegar 6 dots, water 0 dots</a:t>
             </a:r>
             <a:endParaRPr lang="en-US" sz="1700" dirty="0"/>
           </a:p>
@@ -5881,7 +6080,7 @@
                 <a:ea typeface="Arial" pitchFamily="34" charset="-122"/>
                 <a:cs typeface="Arial" pitchFamily="34" charset="-120"/>
               </a:rPr>
-              <a:t>Lemon juice: neutral; baking soda solution: base; tap water: acid</a:t>
+              <a:t>Vinegar 1 dot, water almost no dots</a:t>
             </a:r>
             <a:endParaRPr lang="en-US" sz="1700" dirty="0"/>
           </a:p>
@@ -5981,7 +6180,7 @@
                 <a:ea typeface="Arial" pitchFamily="34" charset="-122"/>
                 <a:cs typeface="Arial" pitchFamily="34" charset="-120"/>
               </a:rPr>
-              <a:t>Lemon juice: acid; baking soda solution: neutral; tap water: base</a:t>
+              <a:t>Vinegar 1 dot, water exactly 0 dots</a:t>
             </a:r>
             <a:endParaRPr lang="en-US" sz="1700" dirty="0"/>
           </a:p>
@@ -6081,7 +6280,7 @@
                 <a:ea typeface="Arial" pitchFamily="34" charset="-122"/>
                 <a:cs typeface="Arial" pitchFamily="34" charset="-120"/>
               </a:rPr>
-              <a:t>Lemon juice: acid; baking soda solution: base; tap water: neutral</a:t>
+              <a:t>Vinegar 12 dots, water 6 dots</a:t>
             </a:r>
             <a:endParaRPr lang="en-US" sz="1700" dirty="0"/>
           </a:p>
@@ -6140,7 +6339,7 @@
     <p:bg>
       <p:bgPr>
         <a:solidFill>
-          <a:srgbClr val="1F3864"/>
+          <a:srgbClr val="6A4C93"/>
         </a:solidFill>
       </p:bgPr>
     </p:bg>
@@ -6166,73 +6365,573 @@
         </p:nvSpPr>
         <p:spPr>
           <a:xfrm>
-            <a:off x="731520" y="2194560"/>
-            <a:ext cx="10698480" cy="822960"/>
-          </a:xfrm>
-          <a:prstGeom prst="rect">
-            <a:avLst/>
-          </a:prstGeom>
-          <a:noFill/>
-          <a:ln/>
-        </p:spPr>
-        <p:txBody>
-          <a:bodyPr wrap="square" lIns="0" tIns="0" rIns="0" bIns="0" rtlCol="0" anchor="ctr"/>
-          <a:lstStyle/>
-          <a:p>
-            <a:pPr indent="0" marL="0">
-              <a:buNone/>
-            </a:pPr>
-            <a:r>
-              <a:rPr lang="en-US" sz="3400" b="1" dirty="0">
-                <a:solidFill>
-                  <a:srgbClr val="FFFFFF"/>
-                </a:solidFill>
-                <a:latin typeface="Arial" pitchFamily="34" charset="0"/>
-                <a:ea typeface="Arial" pitchFamily="34" charset="-122"/>
-                <a:cs typeface="Arial" pitchFamily="34" charset="-120"/>
-              </a:rPr>
-              <a:t>All done</a:t>
-            </a:r>
-            <a:endParaRPr lang="en-US" sz="3400" dirty="0"/>
-          </a:p>
-        </p:txBody>
-      </p:sp>
-      <p:sp>
-        <p:nvSpPr>
-          <p:cNvPr id="3" name="Text 1"/>
-          <p:cNvSpPr/>
-          <p:nvPr/>
-        </p:nvSpPr>
-        <p:spPr>
-          <a:xfrm>
-            <a:off x="731520" y="3108960"/>
-            <a:ext cx="10698480" cy="731520"/>
-          </a:xfrm>
-          <a:prstGeom prst="rect">
-            <a:avLst/>
-          </a:prstGeom>
-          <a:noFill/>
-          <a:ln/>
-        </p:spPr>
-        <p:txBody>
-          <a:bodyPr wrap="square" lIns="0" tIns="0" rIns="0" bIns="0" rtlCol="0" anchor="ctr"/>
-          <a:lstStyle/>
-          <a:p>
-            <a:pPr indent="0" marL="0">
-              <a:buNone/>
-            </a:pPr>
-            <a:r>
-              <a:rPr lang="en-US" sz="1800" dirty="0">
-                <a:solidFill>
-                  <a:srgbClr val="D9EEF1"/>
-                </a:solidFill>
-                <a:latin typeface="Arial" pitchFamily="34" charset="0"/>
-                <a:ea typeface="Arial" pitchFamily="34" charset="-122"/>
-                <a:cs typeface="Arial" pitchFamily="34" charset="-120"/>
-              </a:rPr>
-              <a:t>Ask your teacher how to submit your answers today (for example, on a paper answer slip).</a:t>
+            <a:off x="548640" y="365760"/>
+            <a:ext cx="6400800" cy="365760"/>
+          </a:xfrm>
+          <a:prstGeom prst="rect">
+            <a:avLst/>
+          </a:prstGeom>
+          <a:noFill/>
+          <a:ln/>
+        </p:spPr>
+        <p:txBody>
+          <a:bodyPr wrap="square" lIns="0" tIns="0" rIns="0" bIns="0" rtlCol="0" anchor="ctr"/>
+          <a:lstStyle/>
+          <a:p>
+            <a:pPr indent="0" marL="0">
+              <a:buNone/>
+            </a:pPr>
+            <a:r>
+              <a:rPr lang="en-US" sz="1300" b="1" spc="200" kern="0" dirty="0">
+                <a:solidFill>
+                  <a:srgbClr val="E0D6F0"/>
+                </a:solidFill>
+                <a:latin typeface="Arial" pitchFamily="34" charset="0"/>
+                <a:ea typeface="Arial" pitchFamily="34" charset="-122"/>
+                <a:cs typeface="Arial" pitchFamily="34" charset="-120"/>
+              </a:rPr>
+              <a:t>QUESTION 8 OF 8</a:t>
+            </a:r>
+            <a:endParaRPr lang="en-US" sz="1300" dirty="0"/>
+          </a:p>
+        </p:txBody>
+      </p:sp>
+      <p:sp>
+        <p:nvSpPr>
+          <p:cNvPr id="3" name="Shape 1"/>
+          <p:cNvSpPr/>
+          <p:nvPr/>
+        </p:nvSpPr>
+        <p:spPr>
+          <a:xfrm>
+            <a:off x="8138160" y="320040"/>
+            <a:ext cx="3474720" cy="365760"/>
+          </a:xfrm>
+          <a:prstGeom prst="roundRect">
+            <a:avLst>
+              <a:gd name="adj" fmla="val 15000"/>
+            </a:avLst>
+          </a:prstGeom>
+          <a:solidFill>
+            <a:srgbClr val="5A3F80"/>
+          </a:solidFill>
+          <a:ln/>
+        </p:spPr>
+      </p:sp>
+      <p:sp>
+        <p:nvSpPr>
+          <p:cNvPr id="4" name="Text 2"/>
+          <p:cNvSpPr/>
+          <p:nvPr/>
+        </p:nvSpPr>
+        <p:spPr>
+          <a:xfrm>
+            <a:off x="8138160" y="320040"/>
+            <a:ext cx="3474720" cy="365760"/>
+          </a:xfrm>
+          <a:prstGeom prst="rect">
+            <a:avLst/>
+          </a:prstGeom>
+          <a:noFill/>
+          <a:ln/>
+        </p:spPr>
+        <p:txBody>
+          <a:bodyPr wrap="square" lIns="0" tIns="0" rIns="0" bIns="0" rtlCol="0" anchor="ctr"/>
+          <a:lstStyle/>
+          <a:p>
+            <a:pPr algn="ctr" indent="0" marL="0">
+              <a:buNone/>
+            </a:pPr>
+            <a:r>
+              <a:rPr lang="en-US" sz="1100" i="1" dirty="0">
+                <a:solidFill>
+                  <a:srgbClr val="E0D6F0"/>
+                </a:solidFill>
+                <a:latin typeface="Arial" pitchFamily="34" charset="0"/>
+                <a:ea typeface="Arial" pitchFamily="34" charset="-122"/>
+                <a:cs typeface="Arial" pitchFamily="34" charset="-120"/>
+              </a:rPr>
+              <a:t>Use after: End of lesson</a:t>
+            </a:r>
+            <a:endParaRPr lang="en-US" sz="1100" dirty="0"/>
+          </a:p>
+        </p:txBody>
+      </p:sp>
+      <p:sp>
+        <p:nvSpPr>
+          <p:cNvPr id="5" name="Text 3"/>
+          <p:cNvSpPr/>
+          <p:nvPr/>
+        </p:nvSpPr>
+        <p:spPr>
+          <a:xfrm>
+            <a:off x="548640" y="868680"/>
+            <a:ext cx="11064240" cy="1325880"/>
+          </a:xfrm>
+          <a:prstGeom prst="rect">
+            <a:avLst/>
+          </a:prstGeom>
+          <a:noFill/>
+          <a:ln/>
+        </p:spPr>
+        <p:txBody>
+          <a:bodyPr wrap="square" lIns="0" tIns="0" rIns="0" bIns="0" rtlCol="0" anchor="ctr"/>
+          <a:lstStyle/>
+          <a:p>
+            <a:pPr indent="0" marL="0">
+              <a:buNone/>
+            </a:pPr>
+            <a:r>
+              <a:rPr lang="en-US" sz="2300" b="1" dirty="0">
+                <a:solidFill>
+                  <a:srgbClr val="FFFFFF"/>
+                </a:solidFill>
+                <a:latin typeface="Arial" pitchFamily="34" charset="0"/>
+                <a:ea typeface="Arial" pitchFamily="34" charset="-122"/>
+                <a:cs typeface="Arial" pitchFamily="34" charset="-120"/>
+              </a:rPr>
+              <a:t>Lemon juice turns blue litmus paper red. Which explanation uses the idea from this lesson?</a:t>
+            </a:r>
+            <a:endParaRPr lang="en-US" sz="2300" dirty="0"/>
+          </a:p>
+        </p:txBody>
+      </p:sp>
+      <p:sp>
+        <p:nvSpPr>
+          <p:cNvPr id="6" name="Shape 4"/>
+          <p:cNvSpPr/>
+          <p:nvPr/>
+        </p:nvSpPr>
+        <p:spPr>
+          <a:xfrm>
+            <a:off x="731520" y="2331720"/>
+            <a:ext cx="10698480" cy="777240"/>
+          </a:xfrm>
+          <a:prstGeom prst="roundRect">
+            <a:avLst>
+              <a:gd name="adj" fmla="val 9412"/>
+            </a:avLst>
+          </a:prstGeom>
+          <a:solidFill>
+            <a:srgbClr val="7C5CAA"/>
+          </a:solidFill>
+          <a:ln/>
+        </p:spPr>
+      </p:sp>
+      <p:sp>
+        <p:nvSpPr>
+          <p:cNvPr id="7" name="Text 5"/>
+          <p:cNvSpPr/>
+          <p:nvPr/>
+        </p:nvSpPr>
+        <p:spPr>
+          <a:xfrm>
+            <a:off x="914400" y="2331720"/>
+            <a:ext cx="548640" cy="777240"/>
+          </a:xfrm>
+          <a:prstGeom prst="rect">
+            <a:avLst/>
+          </a:prstGeom>
+          <a:noFill/>
+          <a:ln/>
+        </p:spPr>
+        <p:txBody>
+          <a:bodyPr wrap="square" lIns="0" tIns="0" rIns="0" bIns="0" rtlCol="0" anchor="ctr"/>
+          <a:lstStyle/>
+          <a:p>
+            <a:pPr indent="0" marL="0">
+              <a:buNone/>
+            </a:pPr>
+            <a:r>
+              <a:rPr lang="en-US" sz="1800" b="1" dirty="0">
+                <a:solidFill>
+                  <a:srgbClr val="FFFFFF"/>
+                </a:solidFill>
+                <a:latin typeface="Arial" pitchFamily="34" charset="0"/>
+                <a:ea typeface="Arial" pitchFamily="34" charset="-122"/>
+                <a:cs typeface="Arial" pitchFamily="34" charset="-120"/>
+              </a:rPr>
+              <a:t>A</a:t>
             </a:r>
             <a:endParaRPr lang="en-US" sz="1800" dirty="0"/>
+          </a:p>
+        </p:txBody>
+      </p:sp>
+      <p:sp>
+        <p:nvSpPr>
+          <p:cNvPr id="8" name="Text 6"/>
+          <p:cNvSpPr/>
+          <p:nvPr/>
+        </p:nvSpPr>
+        <p:spPr>
+          <a:xfrm>
+            <a:off x="1554480" y="2331720"/>
+            <a:ext cx="9692640" cy="777240"/>
+          </a:xfrm>
+          <a:prstGeom prst="rect">
+            <a:avLst/>
+          </a:prstGeom>
+          <a:noFill/>
+          <a:ln/>
+        </p:spPr>
+        <p:txBody>
+          <a:bodyPr wrap="square" lIns="0" tIns="0" rIns="0" bIns="0" rtlCol="0" anchor="ctr"/>
+          <a:lstStyle/>
+          <a:p>
+            <a:pPr indent="0" marL="0">
+              <a:buNone/>
+            </a:pPr>
+            <a:r>
+              <a:rPr lang="en-US" sz="1700" dirty="0">
+                <a:solidFill>
+                  <a:srgbClr val="FFFFFF"/>
+                </a:solidFill>
+                <a:latin typeface="Arial" pitchFamily="34" charset="0"/>
+                <a:ea typeface="Arial" pitchFamily="34" charset="-122"/>
+                <a:cs typeface="Arial" pitchFamily="34" charset="-120"/>
+              </a:rPr>
+              <a:t>Lemon juice contains H⁺ (aq) ions released by its acid in water</a:t>
+            </a:r>
+            <a:endParaRPr lang="en-US" sz="1700" dirty="0"/>
+          </a:p>
+        </p:txBody>
+      </p:sp>
+      <p:sp>
+        <p:nvSpPr>
+          <p:cNvPr id="9" name="Shape 7"/>
+          <p:cNvSpPr/>
+          <p:nvPr/>
+        </p:nvSpPr>
+        <p:spPr>
+          <a:xfrm>
+            <a:off x="731520" y="3246120"/>
+            <a:ext cx="10698480" cy="777240"/>
+          </a:xfrm>
+          <a:prstGeom prst="roundRect">
+            <a:avLst>
+              <a:gd name="adj" fmla="val 9412"/>
+            </a:avLst>
+          </a:prstGeom>
+          <a:solidFill>
+            <a:srgbClr val="7C5CAA"/>
+          </a:solidFill>
+          <a:ln/>
+        </p:spPr>
+      </p:sp>
+      <p:sp>
+        <p:nvSpPr>
+          <p:cNvPr id="10" name="Text 8"/>
+          <p:cNvSpPr/>
+          <p:nvPr/>
+        </p:nvSpPr>
+        <p:spPr>
+          <a:xfrm>
+            <a:off x="914400" y="3246120"/>
+            <a:ext cx="548640" cy="777240"/>
+          </a:xfrm>
+          <a:prstGeom prst="rect">
+            <a:avLst/>
+          </a:prstGeom>
+          <a:noFill/>
+          <a:ln/>
+        </p:spPr>
+        <p:txBody>
+          <a:bodyPr wrap="square" lIns="0" tIns="0" rIns="0" bIns="0" rtlCol="0" anchor="ctr"/>
+          <a:lstStyle/>
+          <a:p>
+            <a:pPr indent="0" marL="0">
+              <a:buNone/>
+            </a:pPr>
+            <a:r>
+              <a:rPr lang="en-US" sz="1800" b="1" dirty="0">
+                <a:solidFill>
+                  <a:srgbClr val="FFFFFF"/>
+                </a:solidFill>
+                <a:latin typeface="Arial" pitchFamily="34" charset="0"/>
+                <a:ea typeface="Arial" pitchFamily="34" charset="-122"/>
+                <a:cs typeface="Arial" pitchFamily="34" charset="-120"/>
+              </a:rPr>
+              <a:t>B</a:t>
+            </a:r>
+            <a:endParaRPr lang="en-US" sz="1800" dirty="0"/>
+          </a:p>
+        </p:txBody>
+      </p:sp>
+      <p:sp>
+        <p:nvSpPr>
+          <p:cNvPr id="11" name="Text 9"/>
+          <p:cNvSpPr/>
+          <p:nvPr/>
+        </p:nvSpPr>
+        <p:spPr>
+          <a:xfrm>
+            <a:off x="1554480" y="3246120"/>
+            <a:ext cx="9692640" cy="777240"/>
+          </a:xfrm>
+          <a:prstGeom prst="rect">
+            <a:avLst/>
+          </a:prstGeom>
+          <a:noFill/>
+          <a:ln/>
+        </p:spPr>
+        <p:txBody>
+          <a:bodyPr wrap="square" lIns="0" tIns="0" rIns="0" bIns="0" rtlCol="0" anchor="ctr"/>
+          <a:lstStyle/>
+          <a:p>
+            <a:pPr indent="0" marL="0">
+              <a:buNone/>
+            </a:pPr>
+            <a:r>
+              <a:rPr lang="en-US" sz="1700" dirty="0">
+                <a:solidFill>
+                  <a:srgbClr val="FFFFFF"/>
+                </a:solidFill>
+                <a:latin typeface="Arial" pitchFamily="34" charset="0"/>
+                <a:ea typeface="Arial" pitchFamily="34" charset="-122"/>
+                <a:cs typeface="Arial" pitchFamily="34" charset="-120"/>
+              </a:rPr>
+              <a:t>Lemon juice is red in colour</a:t>
+            </a:r>
+            <a:endParaRPr lang="en-US" sz="1700" dirty="0"/>
+          </a:p>
+        </p:txBody>
+      </p:sp>
+      <p:sp>
+        <p:nvSpPr>
+          <p:cNvPr id="12" name="Shape 10"/>
+          <p:cNvSpPr/>
+          <p:nvPr/>
+        </p:nvSpPr>
+        <p:spPr>
+          <a:xfrm>
+            <a:off x="731520" y="4160520"/>
+            <a:ext cx="10698480" cy="777240"/>
+          </a:xfrm>
+          <a:prstGeom prst="roundRect">
+            <a:avLst>
+              <a:gd name="adj" fmla="val 9412"/>
+            </a:avLst>
+          </a:prstGeom>
+          <a:solidFill>
+            <a:srgbClr val="7C5CAA"/>
+          </a:solidFill>
+          <a:ln/>
+        </p:spPr>
+      </p:sp>
+      <p:sp>
+        <p:nvSpPr>
+          <p:cNvPr id="13" name="Text 11"/>
+          <p:cNvSpPr/>
+          <p:nvPr/>
+        </p:nvSpPr>
+        <p:spPr>
+          <a:xfrm>
+            <a:off x="914400" y="4160520"/>
+            <a:ext cx="548640" cy="777240"/>
+          </a:xfrm>
+          <a:prstGeom prst="rect">
+            <a:avLst/>
+          </a:prstGeom>
+          <a:noFill/>
+          <a:ln/>
+        </p:spPr>
+        <p:txBody>
+          <a:bodyPr wrap="square" lIns="0" tIns="0" rIns="0" bIns="0" rtlCol="0" anchor="ctr"/>
+          <a:lstStyle/>
+          <a:p>
+            <a:pPr indent="0" marL="0">
+              <a:buNone/>
+            </a:pPr>
+            <a:r>
+              <a:rPr lang="en-US" sz="1800" b="1" dirty="0">
+                <a:solidFill>
+                  <a:srgbClr val="FFFFFF"/>
+                </a:solidFill>
+                <a:latin typeface="Arial" pitchFamily="34" charset="0"/>
+                <a:ea typeface="Arial" pitchFamily="34" charset="-122"/>
+                <a:cs typeface="Arial" pitchFamily="34" charset="-120"/>
+              </a:rPr>
+              <a:t>C</a:t>
+            </a:r>
+            <a:endParaRPr lang="en-US" sz="1800" dirty="0"/>
+          </a:p>
+        </p:txBody>
+      </p:sp>
+      <p:sp>
+        <p:nvSpPr>
+          <p:cNvPr id="14" name="Text 12"/>
+          <p:cNvSpPr/>
+          <p:nvPr/>
+        </p:nvSpPr>
+        <p:spPr>
+          <a:xfrm>
+            <a:off x="1554480" y="4160520"/>
+            <a:ext cx="9692640" cy="777240"/>
+          </a:xfrm>
+          <a:prstGeom prst="rect">
+            <a:avLst/>
+          </a:prstGeom>
+          <a:noFill/>
+          <a:ln/>
+        </p:spPr>
+        <p:txBody>
+          <a:bodyPr wrap="square" lIns="0" tIns="0" rIns="0" bIns="0" rtlCol="0" anchor="ctr"/>
+          <a:lstStyle/>
+          <a:p>
+            <a:pPr indent="0" marL="0">
+              <a:buNone/>
+            </a:pPr>
+            <a:r>
+              <a:rPr lang="en-US" sz="1700" dirty="0">
+                <a:solidFill>
+                  <a:srgbClr val="FFFFFF"/>
+                </a:solidFill>
+                <a:latin typeface="Arial" pitchFamily="34" charset="0"/>
+                <a:ea typeface="Arial" pitchFamily="34" charset="-122"/>
+                <a:cs typeface="Arial" pitchFamily="34" charset="-120"/>
+              </a:rPr>
+              <a:t>Lemon juice has no water particles</a:t>
+            </a:r>
+            <a:endParaRPr lang="en-US" sz="1700" dirty="0"/>
+          </a:p>
+        </p:txBody>
+      </p:sp>
+      <p:sp>
+        <p:nvSpPr>
+          <p:cNvPr id="15" name="Shape 13"/>
+          <p:cNvSpPr/>
+          <p:nvPr/>
+        </p:nvSpPr>
+        <p:spPr>
+          <a:xfrm>
+            <a:off x="731520" y="5074920"/>
+            <a:ext cx="10698480" cy="777240"/>
+          </a:xfrm>
+          <a:prstGeom prst="roundRect">
+            <a:avLst>
+              <a:gd name="adj" fmla="val 9412"/>
+            </a:avLst>
+          </a:prstGeom>
+          <a:solidFill>
+            <a:srgbClr val="7C5CAA"/>
+          </a:solidFill>
+          <a:ln/>
+        </p:spPr>
+      </p:sp>
+      <p:sp>
+        <p:nvSpPr>
+          <p:cNvPr id="16" name="Text 14"/>
+          <p:cNvSpPr/>
+          <p:nvPr/>
+        </p:nvSpPr>
+        <p:spPr>
+          <a:xfrm>
+            <a:off x="914400" y="5074920"/>
+            <a:ext cx="548640" cy="777240"/>
+          </a:xfrm>
+          <a:prstGeom prst="rect">
+            <a:avLst/>
+          </a:prstGeom>
+          <a:noFill/>
+          <a:ln/>
+        </p:spPr>
+        <p:txBody>
+          <a:bodyPr wrap="square" lIns="0" tIns="0" rIns="0" bIns="0" rtlCol="0" anchor="ctr"/>
+          <a:lstStyle/>
+          <a:p>
+            <a:pPr indent="0" marL="0">
+              <a:buNone/>
+            </a:pPr>
+            <a:r>
+              <a:rPr lang="en-US" sz="1800" b="1" dirty="0">
+                <a:solidFill>
+                  <a:srgbClr val="FFFFFF"/>
+                </a:solidFill>
+                <a:latin typeface="Arial" pitchFamily="34" charset="0"/>
+                <a:ea typeface="Arial" pitchFamily="34" charset="-122"/>
+                <a:cs typeface="Arial" pitchFamily="34" charset="-120"/>
+              </a:rPr>
+              <a:t>D</a:t>
+            </a:r>
+            <a:endParaRPr lang="en-US" sz="1800" dirty="0"/>
+          </a:p>
+        </p:txBody>
+      </p:sp>
+      <p:sp>
+        <p:nvSpPr>
+          <p:cNvPr id="17" name="Text 15"/>
+          <p:cNvSpPr/>
+          <p:nvPr/>
+        </p:nvSpPr>
+        <p:spPr>
+          <a:xfrm>
+            <a:off x="1554480" y="5074920"/>
+            <a:ext cx="9692640" cy="777240"/>
+          </a:xfrm>
+          <a:prstGeom prst="rect">
+            <a:avLst/>
+          </a:prstGeom>
+          <a:noFill/>
+          <a:ln/>
+        </p:spPr>
+        <p:txBody>
+          <a:bodyPr wrap="square" lIns="0" tIns="0" rIns="0" bIns="0" rtlCol="0" anchor="ctr"/>
+          <a:lstStyle/>
+          <a:p>
+            <a:pPr indent="0" marL="0">
+              <a:buNone/>
+            </a:pPr>
+            <a:r>
+              <a:rPr lang="en-US" sz="1700" dirty="0">
+                <a:solidFill>
+                  <a:srgbClr val="FFFFFF"/>
+                </a:solidFill>
+                <a:latin typeface="Arial" pitchFamily="34" charset="0"/>
+                <a:ea typeface="Arial" pitchFamily="34" charset="-122"/>
+                <a:cs typeface="Arial" pitchFamily="34" charset="-120"/>
+              </a:rPr>
+              <a:t>Lemon juice contains sugar particles</a:t>
+            </a:r>
+            <a:endParaRPr lang="en-US" sz="1700" dirty="0"/>
+          </a:p>
+        </p:txBody>
+      </p:sp>
+      <p:sp>
+        <p:nvSpPr>
+          <p:cNvPr id="18" name="Text 16"/>
+          <p:cNvSpPr/>
+          <p:nvPr/>
+        </p:nvSpPr>
+        <p:spPr>
+          <a:xfrm>
+            <a:off x="11521440" y="6446520"/>
+            <a:ext cx="457200" cy="274320"/>
+          </a:xfrm>
+          <a:prstGeom prst="rect">
+            <a:avLst/>
+          </a:prstGeom>
+          <a:noFill/>
+          <a:ln/>
+        </p:spPr>
+        <p:txBody>
+          <a:bodyPr wrap="square" lIns="0" tIns="0" rIns="0" bIns="0" rtlCol="0" anchor="ctr"/>
+          <a:lstStyle/>
+          <a:p>
+            <a:pPr algn="r" indent="0" marL="0">
+              <a:buNone/>
+            </a:pPr>
+            <a:r>
+              <a:rPr lang="en-US" sz="1000" dirty="0">
+                <a:solidFill>
+                  <a:srgbClr val="C9B8E0"/>
+                </a:solidFill>
+                <a:latin typeface="Arial" pitchFamily="34" charset="0"/>
+                <a:ea typeface="Arial" pitchFamily="34" charset="-122"/>
+                <a:cs typeface="Arial" pitchFamily="34" charset="-120"/>
+              </a:rPr>
+              <a:t>9</a:t>
+            </a:r>
+            <a:endParaRPr lang="en-US" sz="1000" dirty="0"/>
           </a:p>
         </p:txBody>
       </p:sp>
